--- a/outputs/auto-lead-flow-pitch.pptx
+++ b/outputs/auto-lead-flow-pitch.pptx
@@ -2,21 +2,21 @@
 <file path=ppt/presentation.xml><?xml version="1.0" encoding="utf-8"?>
 <p:presentation xmlns:p="http://schemas.openxmlformats.org/presentationml/2006/main">
   <p:sldMasterIdLst>
-    <p:sldMasterId xmlns:r="http://schemas.openxmlformats.org/officeDocument/2006/relationships" id="2147483648" r:id="Ref07e4f050ff4d0d"/>
+    <p:sldMasterId xmlns:r="http://schemas.openxmlformats.org/officeDocument/2006/relationships" id="2147483648" r:id="R01772cef8b8b41de"/>
   </p:sldMasterIdLst>
   <p:notesMasterIdLst>
-    <p:notesMasterId xmlns:r="http://schemas.openxmlformats.org/officeDocument/2006/relationships" r:id="R30faec2011fb4095"/>
+    <p:notesMasterId xmlns:r="http://schemas.openxmlformats.org/officeDocument/2006/relationships" r:id="R683bf0fdb9784fa8"/>
   </p:notesMasterIdLst>
   <p:sldIdLst>
-    <p:sldId xmlns:r="http://schemas.openxmlformats.org/officeDocument/2006/relationships" id="256" r:id="Rf5628e6031314786"/>
-    <p:sldId xmlns:r="http://schemas.openxmlformats.org/officeDocument/2006/relationships" id="257" r:id="R07a2e008ba104484"/>
-    <p:sldId xmlns:r="http://schemas.openxmlformats.org/officeDocument/2006/relationships" id="258" r:id="Rd1a1ae2b389b4e2f"/>
-    <p:sldId xmlns:r="http://schemas.openxmlformats.org/officeDocument/2006/relationships" id="259" r:id="Rc4913b990e4d4b63"/>
-    <p:sldId xmlns:r="http://schemas.openxmlformats.org/officeDocument/2006/relationships" id="260" r:id="Raeb247bd8c33447e"/>
-    <p:sldId xmlns:r="http://schemas.openxmlformats.org/officeDocument/2006/relationships" id="261" r:id="R65da5055c0324d48"/>
-    <p:sldId xmlns:r="http://schemas.openxmlformats.org/officeDocument/2006/relationships" id="262" r:id="R5de277e872ef40a3"/>
-    <p:sldId xmlns:r="http://schemas.openxmlformats.org/officeDocument/2006/relationships" id="263" r:id="Rd8199ebb4dd34b9f"/>
-    <p:sldId xmlns:r="http://schemas.openxmlformats.org/officeDocument/2006/relationships" id="264" r:id="R0164c803342d40c6"/>
+    <p:sldId xmlns:r="http://schemas.openxmlformats.org/officeDocument/2006/relationships" id="256" r:id="R9068ccfe50204fed"/>
+    <p:sldId xmlns:r="http://schemas.openxmlformats.org/officeDocument/2006/relationships" id="257" r:id="Rdd23e321b024490d"/>
+    <p:sldId xmlns:r="http://schemas.openxmlformats.org/officeDocument/2006/relationships" id="258" r:id="R418224d99bd34d61"/>
+    <p:sldId xmlns:r="http://schemas.openxmlformats.org/officeDocument/2006/relationships" id="259" r:id="Re51683b78b444960"/>
+    <p:sldId xmlns:r="http://schemas.openxmlformats.org/officeDocument/2006/relationships" id="260" r:id="R42367bc9442b4be6"/>
+    <p:sldId xmlns:r="http://schemas.openxmlformats.org/officeDocument/2006/relationships" id="261" r:id="Rec138df21882458c"/>
+    <p:sldId xmlns:r="http://schemas.openxmlformats.org/officeDocument/2006/relationships" id="262" r:id="Rebcbbce21f394367"/>
+    <p:sldId xmlns:r="http://schemas.openxmlformats.org/officeDocument/2006/relationships" id="263" r:id="R17be149c6a3b4f30"/>
+    <p:sldId xmlns:r="http://schemas.openxmlformats.org/officeDocument/2006/relationships" id="264" r:id="R9489b7ffbd834393"/>
   </p:sldIdLst>
   <p:sldSz cx="12192000" cy="6858000"/>
   <p:notesSz cx="6858000" cy="9144000"/>
@@ -1173,7 +1173,7 @@
   </p:cSld>
   <p:clrMap bg1="lt1" tx1="dk1" bg2="lt2" tx2="dk2" accent1="accent1" accent2="accent2" accent3="accent3" accent4="accent4" accent5="accent5" accent6="accent6" hlink="hlink" folHlink="folHlink"/>
   <p:sldLayoutIdLst>
-    <p:sldLayoutId xmlns:r="http://schemas.openxmlformats.org/officeDocument/2006/relationships" id="2147483649" r:id="Rb6dd46e136154278"/>
+    <p:sldLayoutId xmlns:r="http://schemas.openxmlformats.org/officeDocument/2006/relationships" id="2147483649" r:id="Rce7510d844cb43c5"/>
   </p:sldLayoutIdLst>
   <p:txStyles>
     <p:titleStyle>
@@ -1728,7 +1728,7 @@
           <p:nvPr/>
         </p:nvPicPr>
         <p:blipFill>
-          <a:blip xmlns:r="http://schemas.openxmlformats.org/officeDocument/2006/relationships" xmlns:a="http://schemas.openxmlformats.org/drawingml/2006/main" r:embed="R0ec5bf673280436c"/>
+          <a:blip xmlns:r="http://schemas.openxmlformats.org/officeDocument/2006/relationships" xmlns:a="http://schemas.openxmlformats.org/drawingml/2006/main" r:embed="Raa134148254a4f9d"/>
           <a:stretch xmlns:a="http://schemas.openxmlformats.org/drawingml/2006/main"/>
         </p:blipFill>
         <p:spPr>
@@ -1746,7 +1746,7 @@
           <p:cNvPr id="2" name="">
             <a:extLst xmlns:a="http://schemas.openxmlformats.org/drawingml/2006/main">
               <a:ext uri="{FF2B5EF4-FFF2-40B4-BE49-F238E27FC236}">
-                <a16:creationId xmlns:a16="http://schemas.microsoft.com/office/drawing/2014/main" id="{B440521D-D428-4C16-89AC-006B0D49B6EE}"/>
+                <a16:creationId xmlns:a16="http://schemas.microsoft.com/office/drawing/2014/main" id="{AD43DE70-8D72-4512-9AE4-F45AE7EDF830}"/>
               </a:ext>
             </a:extLst>
           </p:cNvPr>
@@ -1796,7 +1796,7 @@
           <p:cNvPr id="3" name="">
             <a:extLst xmlns:a="http://schemas.openxmlformats.org/drawingml/2006/main">
               <a:ext uri="{FF2B5EF4-FFF2-40B4-BE49-F238E27FC236}">
-                <a16:creationId xmlns:a16="http://schemas.microsoft.com/office/drawing/2014/main" id="{B67DA5A3-A843-46E5-802B-869C48AF578B}"/>
+                <a16:creationId xmlns:a16="http://schemas.microsoft.com/office/drawing/2014/main" id="{8E7A9817-E6F5-479A-BA3B-64733346ADBF}"/>
               </a:ext>
             </a:extLst>
           </p:cNvPr>
@@ -1863,7 +1863,7 @@
           <p:cNvPr id="4" name="">
             <a:extLst xmlns:a="http://schemas.openxmlformats.org/drawingml/2006/main">
               <a:ext uri="{FF2B5EF4-FFF2-40B4-BE49-F238E27FC236}">
-                <a16:creationId xmlns:a16="http://schemas.microsoft.com/office/drawing/2014/main" id="{0F6D4064-85DD-4D15-84EF-85F7B116B2FB}"/>
+                <a16:creationId xmlns:a16="http://schemas.microsoft.com/office/drawing/2014/main" id="{1EFAEA1F-03D7-4954-935A-42AC36F36AF5}"/>
               </a:ext>
             </a:extLst>
           </p:cNvPr>
@@ -1875,7 +1875,7 @@
         <p:spPr>
           <a:xfrm xmlns:a="http://schemas.openxmlformats.org/drawingml/2006/main">
             <a:off x="838200" y="3333750"/>
-            <a:ext cx="5905500" cy="323850"/>
+            <a:ext cx="5905500" cy="495300"/>
           </a:xfrm>
           <a:prstGeom xmlns:a="http://schemas.openxmlformats.org/drawingml/2006/main" prst="rect">
             <a:avLst/>
@@ -1903,7 +1903,7 @@
                   <a:srgbClr val="58706E"/>
                 </a:solidFill>
               </a:rPr>
-              <a:t>社交平台线索自动发现、真实触达与持续跟进</a:t>
+              <a:t>Automated social lead discovery, real outreach, and persistent follow-up</a:t>
             </a:r>
           </a:p>
         </p:txBody>
@@ -1913,7 +1913,7 @@
           <p:cNvPr id="5" name="">
             <a:extLst xmlns:a="http://schemas.openxmlformats.org/drawingml/2006/main">
               <a:ext uri="{FF2B5EF4-FFF2-40B4-BE49-F238E27FC236}">
-                <a16:creationId xmlns:a16="http://schemas.microsoft.com/office/drawing/2014/main" id="{0A161E64-3D5E-49E5-B574-60A811A7FA1B}"/>
+                <a16:creationId xmlns:a16="http://schemas.microsoft.com/office/drawing/2014/main" id="{3FB7AD5B-660F-4851-9244-9EC8845899DD}"/>
               </a:ext>
             </a:extLst>
           </p:cNvPr>
@@ -1969,7 +1969,7 @@
           <p:cNvPr id="6" name="">
             <a:extLst xmlns:a="http://schemas.openxmlformats.org/drawingml/2006/main">
               <a:ext uri="{FF2B5EF4-FFF2-40B4-BE49-F238E27FC236}">
-                <a16:creationId xmlns:a16="http://schemas.microsoft.com/office/drawing/2014/main" id="{86AFCBBD-E832-46F8-837B-24FD1E1B5057}"/>
+                <a16:creationId xmlns:a16="http://schemas.microsoft.com/office/drawing/2014/main" id="{752F900E-48AA-49BB-A47D-88383FB3863A}"/>
               </a:ext>
             </a:extLst>
           </p:cNvPr>
@@ -2025,7 +2025,7 @@
           <p:cNvPr id="7" name="">
             <a:extLst xmlns:a="http://schemas.openxmlformats.org/drawingml/2006/main">
               <a:ext uri="{FF2B5EF4-FFF2-40B4-BE49-F238E27FC236}">
-                <a16:creationId xmlns:a16="http://schemas.microsoft.com/office/drawing/2014/main" id="{4AAB3272-1312-4800-B40B-912EBA35FFA4}"/>
+                <a16:creationId xmlns:a16="http://schemas.microsoft.com/office/drawing/2014/main" id="{48C31A9A-87C9-48F8-8393-CA0B2183A29A}"/>
               </a:ext>
             </a:extLst>
           </p:cNvPr>
@@ -2058,7 +2058,7 @@
           <p:cNvPr id="8" name="">
             <a:extLst xmlns:a="http://schemas.openxmlformats.org/drawingml/2006/main">
               <a:ext uri="{FF2B5EF4-FFF2-40B4-BE49-F238E27FC236}">
-                <a16:creationId xmlns:a16="http://schemas.microsoft.com/office/drawing/2014/main" id="{56815E77-D135-4C08-9F3E-5BCE5B6A10B5}"/>
+                <a16:creationId xmlns:a16="http://schemas.microsoft.com/office/drawing/2014/main" id="{A666974C-BC33-462B-A71E-FA319D49A7E9}"/>
               </a:ext>
             </a:extLst>
           </p:cNvPr>
@@ -2114,7 +2114,7 @@
           <p:cNvPr id="9" name="">
             <a:extLst xmlns:a="http://schemas.openxmlformats.org/drawingml/2006/main">
               <a:ext uri="{FF2B5EF4-FFF2-40B4-BE49-F238E27FC236}">
-                <a16:creationId xmlns:a16="http://schemas.microsoft.com/office/drawing/2014/main" id="{D947AA6E-D7FD-49DE-85BC-5D1CD1A8BB69}"/>
+                <a16:creationId xmlns:a16="http://schemas.microsoft.com/office/drawing/2014/main" id="{A292F522-9FFE-46BC-9C7C-E80CFDFDFA8D}"/>
               </a:ext>
             </a:extLst>
           </p:cNvPr>
@@ -2147,7 +2147,7 @@
           <p:cNvPr id="10" name="">
             <a:extLst xmlns:a="http://schemas.openxmlformats.org/drawingml/2006/main">
               <a:ext uri="{FF2B5EF4-FFF2-40B4-BE49-F238E27FC236}">
-                <a16:creationId xmlns:a16="http://schemas.microsoft.com/office/drawing/2014/main" id="{E2A68F12-9BCD-43AB-B48C-B7A0897DF04E}"/>
+                <a16:creationId xmlns:a16="http://schemas.microsoft.com/office/drawing/2014/main" id="{E6992BFB-A7E1-4D13-BC09-440377ED741D}"/>
               </a:ext>
             </a:extLst>
           </p:cNvPr>
@@ -2203,7 +2203,7 @@
           <p:cNvPr id="11" name="">
             <a:extLst xmlns:a="http://schemas.openxmlformats.org/drawingml/2006/main">
               <a:ext uri="{FF2B5EF4-FFF2-40B4-BE49-F238E27FC236}">
-                <a16:creationId xmlns:a16="http://schemas.microsoft.com/office/drawing/2014/main" id="{CD5206B6-5A10-498F-94B6-2A8DE031A574}"/>
+                <a16:creationId xmlns:a16="http://schemas.microsoft.com/office/drawing/2014/main" id="{C777B13E-6094-47CC-B421-06A5D417EF0B}"/>
               </a:ext>
             </a:extLst>
           </p:cNvPr>
@@ -2234,7 +2234,7 @@
     </p:spTree>
     <p:extLst>
       <p:ext uri="{BB962C8B-B14F-4D97-AF65-F5344CB8AC3E}">
-        <p14:creationId xmlns:p14="http://schemas.microsoft.com/office/powerpoint/2010/main" val="1459936114"/>
+        <p14:creationId xmlns:p14="http://schemas.microsoft.com/office/powerpoint/2010/main" val="1564446724"/>
       </p:ext>
     </p:extLst>
   </p:cSld>
@@ -2265,7 +2265,7 @@
           <p:cNvPr id="1" name="">
             <a:extLst xmlns:a="http://schemas.openxmlformats.org/drawingml/2006/main">
               <a:ext uri="{FF2B5EF4-FFF2-40B4-BE49-F238E27FC236}">
-                <a16:creationId xmlns:a16="http://schemas.microsoft.com/office/drawing/2014/main" id="{03AF1384-22B4-45B7-B60E-1BFF2BD9B91D}"/>
+                <a16:creationId xmlns:a16="http://schemas.microsoft.com/office/drawing/2014/main" id="{C505BD24-7B79-47C5-8954-28687F49EFE5}"/>
               </a:ext>
             </a:extLst>
           </p:cNvPr>
@@ -2315,7 +2315,7 @@
           <p:cNvPr id="2" name="">
             <a:extLst xmlns:a="http://schemas.openxmlformats.org/drawingml/2006/main">
               <a:ext uri="{FF2B5EF4-FFF2-40B4-BE49-F238E27FC236}">
-                <a16:creationId xmlns:a16="http://schemas.microsoft.com/office/drawing/2014/main" id="{C66E12D4-9211-456C-B4FE-5F59BF1F2E40}"/>
+                <a16:creationId xmlns:a16="http://schemas.microsoft.com/office/drawing/2014/main" id="{025345ED-4148-4A1C-94E1-E3D74C7575A4}"/>
               </a:ext>
             </a:extLst>
           </p:cNvPr>
@@ -2355,7 +2355,7 @@
                   <a:srgbClr val="58706E"/>
                 </a:solidFill>
               </a:rPr>
-              <a:t>社交平台获客仍然高度依赖人工搜索、判断和重复触达。</a:t>
+              <a:t>Social acquisition still depends on manual search, judgment, and repeated outreach.</a:t>
             </a:r>
           </a:p>
         </p:txBody>
@@ -2365,7 +2365,7 @@
           <p:cNvPr id="3" name="">
             <a:extLst xmlns:a="http://schemas.openxmlformats.org/drawingml/2006/main">
               <a:ext uri="{FF2B5EF4-FFF2-40B4-BE49-F238E27FC236}">
-                <a16:creationId xmlns:a16="http://schemas.microsoft.com/office/drawing/2014/main" id="{F954A71F-CBD6-4CC5-BDF6-4F0976F6D234}"/>
+                <a16:creationId xmlns:a16="http://schemas.microsoft.com/office/drawing/2014/main" id="{428B40F5-9075-4755-8834-7312E0BE6686}"/>
               </a:ext>
             </a:extLst>
           </p:cNvPr>
@@ -2406,7 +2406,7 @@
           <p:cNvPr id="4" name="">
             <a:extLst xmlns:a="http://schemas.openxmlformats.org/drawingml/2006/main">
               <a:ext uri="{FF2B5EF4-FFF2-40B4-BE49-F238E27FC236}">
-                <a16:creationId xmlns:a16="http://schemas.microsoft.com/office/drawing/2014/main" id="{4BE0D45B-5A0C-459D-A873-4F704421BA71}"/>
+                <a16:creationId xmlns:a16="http://schemas.microsoft.com/office/drawing/2014/main" id="{413447B2-DACB-41A8-93D3-1D358760AA57}"/>
               </a:ext>
             </a:extLst>
           </p:cNvPr>
@@ -2439,7 +2439,7 @@
           <p:cNvPr id="5" name="">
             <a:extLst xmlns:a="http://schemas.openxmlformats.org/drawingml/2006/main">
               <a:ext uri="{FF2B5EF4-FFF2-40B4-BE49-F238E27FC236}">
-                <a16:creationId xmlns:a16="http://schemas.microsoft.com/office/drawing/2014/main" id="{B20E5310-F9F7-46DA-ACD2-FEFF223EFF2A}"/>
+                <a16:creationId xmlns:a16="http://schemas.microsoft.com/office/drawing/2014/main" id="{8A814AB5-1571-4741-83D1-FC83A5DC18DF}"/>
               </a:ext>
             </a:extLst>
           </p:cNvPr>
@@ -2489,7 +2489,7 @@
           <p:cNvPr id="6" name="">
             <a:extLst xmlns:a="http://schemas.openxmlformats.org/drawingml/2006/main">
               <a:ext uri="{FF2B5EF4-FFF2-40B4-BE49-F238E27FC236}">
-                <a16:creationId xmlns:a16="http://schemas.microsoft.com/office/drawing/2014/main" id="{0A19470A-7172-4CA7-85FC-A52E44207A52}"/>
+                <a16:creationId xmlns:a16="http://schemas.microsoft.com/office/drawing/2014/main" id="{3E405023-9528-4AAE-981B-5EFF9C6F685A}"/>
               </a:ext>
             </a:extLst>
           </p:cNvPr>
@@ -2539,7 +2539,7 @@
           <p:cNvPr id="7" name="">
             <a:extLst xmlns:a="http://schemas.openxmlformats.org/drawingml/2006/main">
               <a:ext uri="{FF2B5EF4-FFF2-40B4-BE49-F238E27FC236}">
-                <a16:creationId xmlns:a16="http://schemas.microsoft.com/office/drawing/2014/main" id="{0C9D2D11-D0C7-4D08-9367-8887245EAB56}"/>
+                <a16:creationId xmlns:a16="http://schemas.microsoft.com/office/drawing/2014/main" id="{6B09330D-552E-483D-8446-1FBF179CFBBF}"/>
               </a:ext>
             </a:extLst>
           </p:cNvPr>
@@ -2580,7 +2580,7 @@
           <p:cNvPr id="8" name="">
             <a:extLst xmlns:a="http://schemas.openxmlformats.org/drawingml/2006/main">
               <a:ext uri="{FF2B5EF4-FFF2-40B4-BE49-F238E27FC236}">
-                <a16:creationId xmlns:a16="http://schemas.microsoft.com/office/drawing/2014/main" id="{AF3F4BB3-4A63-49C0-B165-931E959FA409}"/>
+                <a16:creationId xmlns:a16="http://schemas.microsoft.com/office/drawing/2014/main" id="{5240FA16-4BFF-4960-817F-7AA575200BA8}"/>
               </a:ext>
             </a:extLst>
           </p:cNvPr>
@@ -2613,7 +2613,7 @@
           <p:cNvPr id="9" name="">
             <a:extLst xmlns:a="http://schemas.openxmlformats.org/drawingml/2006/main">
               <a:ext uri="{FF2B5EF4-FFF2-40B4-BE49-F238E27FC236}">
-                <a16:creationId xmlns:a16="http://schemas.microsoft.com/office/drawing/2014/main" id="{A02141DB-1833-462C-A994-1F4CF5E12D07}"/>
+                <a16:creationId xmlns:a16="http://schemas.microsoft.com/office/drawing/2014/main" id="{A04346DD-8A05-405F-A3D6-747E1A6B5AFC}"/>
               </a:ext>
             </a:extLst>
           </p:cNvPr>
@@ -2663,7 +2663,7 @@
           <p:cNvPr id="10" name="">
             <a:extLst xmlns:a="http://schemas.openxmlformats.org/drawingml/2006/main">
               <a:ext uri="{FF2B5EF4-FFF2-40B4-BE49-F238E27FC236}">
-                <a16:creationId xmlns:a16="http://schemas.microsoft.com/office/drawing/2014/main" id="{82DC0756-4F01-40C5-8B45-EFDB83CA74B7}"/>
+                <a16:creationId xmlns:a16="http://schemas.microsoft.com/office/drawing/2014/main" id="{1480984E-3D7C-45C7-A7DF-636D055415C4}"/>
               </a:ext>
             </a:extLst>
           </p:cNvPr>
@@ -2713,7 +2713,7 @@
           <p:cNvPr id="11" name="">
             <a:extLst xmlns:a="http://schemas.openxmlformats.org/drawingml/2006/main">
               <a:ext uri="{FF2B5EF4-FFF2-40B4-BE49-F238E27FC236}">
-                <a16:creationId xmlns:a16="http://schemas.microsoft.com/office/drawing/2014/main" id="{B588E035-7384-4A78-923B-AE23D43A6F02}"/>
+                <a16:creationId xmlns:a16="http://schemas.microsoft.com/office/drawing/2014/main" id="{125BF6FB-0274-4F09-B7BB-501A752F07D6}"/>
               </a:ext>
             </a:extLst>
           </p:cNvPr>
@@ -2754,7 +2754,7 @@
           <p:cNvPr id="12" name="">
             <a:extLst xmlns:a="http://schemas.openxmlformats.org/drawingml/2006/main">
               <a:ext uri="{FF2B5EF4-FFF2-40B4-BE49-F238E27FC236}">
-                <a16:creationId xmlns:a16="http://schemas.microsoft.com/office/drawing/2014/main" id="{C68E926B-833E-417F-B438-3196350BE43F}"/>
+                <a16:creationId xmlns:a16="http://schemas.microsoft.com/office/drawing/2014/main" id="{7EB5330A-7286-4701-B336-665641B1B591}"/>
               </a:ext>
             </a:extLst>
           </p:cNvPr>
@@ -2787,7 +2787,7 @@
           <p:cNvPr id="13" name="">
             <a:extLst xmlns:a="http://schemas.openxmlformats.org/drawingml/2006/main">
               <a:ext uri="{FF2B5EF4-FFF2-40B4-BE49-F238E27FC236}">
-                <a16:creationId xmlns:a16="http://schemas.microsoft.com/office/drawing/2014/main" id="{C248F9FA-27BD-46C4-8680-30D1DF0B0B71}"/>
+                <a16:creationId xmlns:a16="http://schemas.microsoft.com/office/drawing/2014/main" id="{6210AE1E-F1B2-4F35-8E9B-CC83A2662AA8}"/>
               </a:ext>
             </a:extLst>
           </p:cNvPr>
@@ -2837,7 +2837,7 @@
           <p:cNvPr id="14" name="">
             <a:extLst xmlns:a="http://schemas.openxmlformats.org/drawingml/2006/main">
               <a:ext uri="{FF2B5EF4-FFF2-40B4-BE49-F238E27FC236}">
-                <a16:creationId xmlns:a16="http://schemas.microsoft.com/office/drawing/2014/main" id="{F34BBA41-DD8E-4581-9DA6-5B3DC781509A}"/>
+                <a16:creationId xmlns:a16="http://schemas.microsoft.com/office/drawing/2014/main" id="{C5659292-8F69-4638-9AEA-DE40EA2BC4C7}"/>
               </a:ext>
             </a:extLst>
           </p:cNvPr>
@@ -2887,7 +2887,7 @@
           <p:cNvPr id="15" name="">
             <a:extLst xmlns:a="http://schemas.openxmlformats.org/drawingml/2006/main">
               <a:ext uri="{FF2B5EF4-FFF2-40B4-BE49-F238E27FC236}">
-                <a16:creationId xmlns:a16="http://schemas.microsoft.com/office/drawing/2014/main" id="{F16D93BE-CE35-4705-BE96-71EE620CFAC6}"/>
+                <a16:creationId xmlns:a16="http://schemas.microsoft.com/office/drawing/2014/main" id="{F16DDD00-4F86-4C72-B6FB-9141EA5421A9}"/>
               </a:ext>
             </a:extLst>
           </p:cNvPr>
@@ -2937,7 +2937,7 @@
           <p:cNvPr id="16" name="">
             <a:extLst xmlns:a="http://schemas.openxmlformats.org/drawingml/2006/main">
               <a:ext uri="{FF2B5EF4-FFF2-40B4-BE49-F238E27FC236}">
-                <a16:creationId xmlns:a16="http://schemas.microsoft.com/office/drawing/2014/main" id="{871B3131-1173-42B3-B3FD-8E4FA11CBD92}"/>
+                <a16:creationId xmlns:a16="http://schemas.microsoft.com/office/drawing/2014/main" id="{2ACCDFAD-4806-4BC5-9E0A-1A4C2F96F743}"/>
               </a:ext>
             </a:extLst>
           </p:cNvPr>
@@ -2985,7 +2985,7 @@
     </p:spTree>
     <p:extLst>
       <p:ext uri="{BB962C8B-B14F-4D97-AF65-F5344CB8AC3E}">
-        <p14:creationId xmlns:p14="http://schemas.microsoft.com/office/powerpoint/2010/main" val="802671165"/>
+        <p14:creationId xmlns:p14="http://schemas.microsoft.com/office/powerpoint/2010/main" val="1039009530"/>
       </p:ext>
     </p:extLst>
   </p:cSld>
@@ -3016,7 +3016,7 @@
           <p:cNvPr id="1" name="">
             <a:extLst xmlns:a="http://schemas.openxmlformats.org/drawingml/2006/main">
               <a:ext uri="{FF2B5EF4-FFF2-40B4-BE49-F238E27FC236}">
-                <a16:creationId xmlns:a16="http://schemas.microsoft.com/office/drawing/2014/main" id="{EB4C0397-9F73-493B-B56C-C9C3A893541F}"/>
+                <a16:creationId xmlns:a16="http://schemas.microsoft.com/office/drawing/2014/main" id="{96E9182D-A8CE-4EAF-87FC-3C5429F2E7FF}"/>
               </a:ext>
             </a:extLst>
           </p:cNvPr>
@@ -3066,7 +3066,7 @@
           <p:cNvPr id="2" name="">
             <a:extLst xmlns:a="http://schemas.openxmlformats.org/drawingml/2006/main">
               <a:ext uri="{FF2B5EF4-FFF2-40B4-BE49-F238E27FC236}">
-                <a16:creationId xmlns:a16="http://schemas.microsoft.com/office/drawing/2014/main" id="{DB64FE98-5DD4-4DA7-A8D2-1FAD54542F46}"/>
+                <a16:creationId xmlns:a16="http://schemas.microsoft.com/office/drawing/2014/main" id="{03F8EAE2-BC24-4E14-A324-B620D6D638B3}"/>
               </a:ext>
             </a:extLst>
           </p:cNvPr>
@@ -3106,7 +3106,7 @@
                   <a:srgbClr val="58706E"/>
                 </a:solidFill>
               </a:rPr>
-              <a:t>机会：很多潜在线索已经在社交内容里表达了明确需求。</a:t>
+              <a:t>Many potential customers already reveal clear buying needs in social content.</a:t>
             </a:r>
           </a:p>
         </p:txBody>
@@ -3116,7 +3116,7 @@
           <p:cNvPr id="3" name="">
             <a:extLst xmlns:a="http://schemas.openxmlformats.org/drawingml/2006/main">
               <a:ext uri="{FF2B5EF4-FFF2-40B4-BE49-F238E27FC236}">
-                <a16:creationId xmlns:a16="http://schemas.microsoft.com/office/drawing/2014/main" id="{1E76D700-E025-43A8-A5F5-7A7B33115C69}"/>
+                <a16:creationId xmlns:a16="http://schemas.microsoft.com/office/drawing/2014/main" id="{B6A98F1F-CACE-4601-B710-9A83BA1AA239}"/>
               </a:ext>
             </a:extLst>
           </p:cNvPr>
@@ -3157,7 +3157,7 @@
           <p:cNvPr id="4" name="">
             <a:extLst xmlns:a="http://schemas.openxmlformats.org/drawingml/2006/main">
               <a:ext uri="{FF2B5EF4-FFF2-40B4-BE49-F238E27FC236}">
-                <a16:creationId xmlns:a16="http://schemas.microsoft.com/office/drawing/2014/main" id="{8B90A8CB-CD99-4590-A206-DB8770A68EE0}"/>
+                <a16:creationId xmlns:a16="http://schemas.microsoft.com/office/drawing/2014/main" id="{41F5B8AE-3305-46BA-95AE-025D9D9549B5}"/>
               </a:ext>
             </a:extLst>
           </p:cNvPr>
@@ -3207,19 +3207,19 @@
           <p:cNvPr id="5" name="">
             <a:extLst xmlns:a="http://schemas.openxmlformats.org/drawingml/2006/main">
               <a:ext uri="{FF2B5EF4-FFF2-40B4-BE49-F238E27FC236}">
-                <a16:creationId xmlns:a16="http://schemas.microsoft.com/office/drawing/2014/main" id="{2DCFAAC1-4D0F-4C0E-BEBD-F91A4A5E250F}"/>
-              </a:ext>
-            </a:extLst>
-          </p:cNvPr>
-          <p:cNvSpPr>
-            <a:spLocks xmlns:a="http://schemas.openxmlformats.org/drawingml/2006/main" noGrp="1"/>
-          </p:cNvSpPr>
-          <p:nvPr/>
-        </p:nvSpPr>
-        <p:spPr>
-          <a:xfrm xmlns:a="http://schemas.openxmlformats.org/drawingml/2006/main">
-            <a:off x="1181100" y="2457450"/>
-            <a:ext cx="4343400" cy="1162050"/>
+                <a16:creationId xmlns:a16="http://schemas.microsoft.com/office/drawing/2014/main" id="{B29CEFFB-1C96-4BE6-902B-36C83900DE40}"/>
+              </a:ext>
+            </a:extLst>
+          </p:cNvPr>
+          <p:cNvSpPr>
+            <a:spLocks xmlns:a="http://schemas.openxmlformats.org/drawingml/2006/main" noGrp="1"/>
+          </p:cNvSpPr>
+          <p:nvPr/>
+        </p:nvSpPr>
+        <p:spPr>
+          <a:xfrm xmlns:a="http://schemas.openxmlformats.org/drawingml/2006/main">
+            <a:off x="1181100" y="2381250"/>
+            <a:ext cx="4343400" cy="1352550"/>
           </a:xfrm>
           <a:prstGeom xmlns:a="http://schemas.openxmlformats.org/drawingml/2006/main" prst="rect">
             <a:avLst/>
@@ -3235,19 +3235,19 @@
           <a:lstStyle xmlns:a="http://schemas.openxmlformats.org/drawingml/2006/main"/>
           <a:p xmlns:a="http://schemas.openxmlformats.org/drawingml/2006/main">
             <a:pPr algn="l">
-              <a:defRPr sz="2250" b="1">
+              <a:defRPr sz="2100" b="1">
                 <a:solidFill>
                   <a:srgbClr val="103B3A"/>
                 </a:solidFill>
               </a:defRPr>
             </a:pPr>
             <a:r>
-              <a:rPr sz="2250" b="1">
+              <a:rPr sz="2100" b="1">
                 <a:solidFill>
                   <a:srgbClr val="103B3A"/>
                 </a:solidFill>
               </a:rPr>
-              <a:t>“想在高新区附近买个三房，预算别太高，最好通勤方便。”</a:t>
+              <a:t>"Looking for a three-bedroom near the High-Tech District. Budget matters, and commute should be easy."</a:t>
             </a:r>
           </a:p>
         </p:txBody>
@@ -3257,7 +3257,7 @@
           <p:cNvPr id="6" name="">
             <a:extLst xmlns:a="http://schemas.openxmlformats.org/drawingml/2006/main">
               <a:ext uri="{FF2B5EF4-FFF2-40B4-BE49-F238E27FC236}">
-                <a16:creationId xmlns:a16="http://schemas.microsoft.com/office/drawing/2014/main" id="{ABA4D123-FBA8-4DA8-9D6A-19417579533F}"/>
+                <a16:creationId xmlns:a16="http://schemas.microsoft.com/office/drawing/2014/main" id="{A30CC426-A7A0-440F-B375-E87FABF226BE}"/>
               </a:ext>
             </a:extLst>
           </p:cNvPr>
@@ -3307,7 +3307,7 @@
           <p:cNvPr id="7" name="">
             <a:extLst xmlns:a="http://schemas.openxmlformats.org/drawingml/2006/main">
               <a:ext uri="{FF2B5EF4-FFF2-40B4-BE49-F238E27FC236}">
-                <a16:creationId xmlns:a16="http://schemas.microsoft.com/office/drawing/2014/main" id="{41BF7363-6B65-4558-867B-43A30589BA4B}"/>
+                <a16:creationId xmlns:a16="http://schemas.microsoft.com/office/drawing/2014/main" id="{12C811AD-6354-4223-B61A-3CDE07A9CA1A}"/>
               </a:ext>
             </a:extLst>
           </p:cNvPr>
@@ -3342,7 +3342,7 @@
           <p:cNvPr id="8" name="">
             <a:extLst xmlns:a="http://schemas.openxmlformats.org/drawingml/2006/main">
               <a:ext uri="{FF2B5EF4-FFF2-40B4-BE49-F238E27FC236}">
-                <a16:creationId xmlns:a16="http://schemas.microsoft.com/office/drawing/2014/main" id="{E5BB2C8C-1E64-4CC0-86F1-F5FF2FF82236}"/>
+                <a16:creationId xmlns:a16="http://schemas.microsoft.com/office/drawing/2014/main" id="{ABEBD640-02CD-43B9-A184-809B4D085E02}"/>
               </a:ext>
             </a:extLst>
           </p:cNvPr>
@@ -3392,7 +3392,7 @@
           <p:cNvPr id="9" name="">
             <a:extLst xmlns:a="http://schemas.openxmlformats.org/drawingml/2006/main">
               <a:ext uri="{FF2B5EF4-FFF2-40B4-BE49-F238E27FC236}">
-                <a16:creationId xmlns:a16="http://schemas.microsoft.com/office/drawing/2014/main" id="{B381211B-CE9F-4A13-9D8F-985CFB90E875}"/>
+                <a16:creationId xmlns:a16="http://schemas.microsoft.com/office/drawing/2014/main" id="{FBEE351D-3B19-4EAF-AEE6-D6A80CB2FB2C}"/>
               </a:ext>
             </a:extLst>
           </p:cNvPr>
@@ -3442,7 +3442,7 @@
           <p:cNvPr id="10" name="">
             <a:extLst xmlns:a="http://schemas.openxmlformats.org/drawingml/2006/main">
               <a:ext uri="{FF2B5EF4-FFF2-40B4-BE49-F238E27FC236}">
-                <a16:creationId xmlns:a16="http://schemas.microsoft.com/office/drawing/2014/main" id="{B126492D-5877-40DD-80D1-FC6B5E988D87}"/>
+                <a16:creationId xmlns:a16="http://schemas.microsoft.com/office/drawing/2014/main" id="{2841C483-881C-45F0-A401-2F6F0B8E3342}"/>
               </a:ext>
             </a:extLst>
           </p:cNvPr>
@@ -3477,7 +3477,7 @@
           <p:cNvPr id="11" name="">
             <a:extLst xmlns:a="http://schemas.openxmlformats.org/drawingml/2006/main">
               <a:ext uri="{FF2B5EF4-FFF2-40B4-BE49-F238E27FC236}">
-                <a16:creationId xmlns:a16="http://schemas.microsoft.com/office/drawing/2014/main" id="{8E8AB39E-3486-4235-A399-B8CF9525D29F}"/>
+                <a16:creationId xmlns:a16="http://schemas.microsoft.com/office/drawing/2014/main" id="{B055F266-9E0E-4D7B-B434-AEE8E70B13D5}"/>
               </a:ext>
             </a:extLst>
           </p:cNvPr>
@@ -3527,7 +3527,7 @@
           <p:cNvPr id="12" name="">
             <a:extLst xmlns:a="http://schemas.openxmlformats.org/drawingml/2006/main">
               <a:ext uri="{FF2B5EF4-FFF2-40B4-BE49-F238E27FC236}">
-                <a16:creationId xmlns:a16="http://schemas.microsoft.com/office/drawing/2014/main" id="{CE35517F-B40C-401C-A9B0-C53F0C162783}"/>
+                <a16:creationId xmlns:a16="http://schemas.microsoft.com/office/drawing/2014/main" id="{74D3D9B6-1033-403B-A483-0AEF229D859C}"/>
               </a:ext>
             </a:extLst>
           </p:cNvPr>
@@ -3577,7 +3577,7 @@
           <p:cNvPr id="13" name="">
             <a:extLst xmlns:a="http://schemas.openxmlformats.org/drawingml/2006/main">
               <a:ext uri="{FF2B5EF4-FFF2-40B4-BE49-F238E27FC236}">
-                <a16:creationId xmlns:a16="http://schemas.microsoft.com/office/drawing/2014/main" id="{131F0215-E905-4DE4-89AF-68E591D88718}"/>
+                <a16:creationId xmlns:a16="http://schemas.microsoft.com/office/drawing/2014/main" id="{F78255D8-79A9-4225-A584-352C995E457C}"/>
               </a:ext>
             </a:extLst>
           </p:cNvPr>
@@ -3612,7 +3612,7 @@
           <p:cNvPr id="14" name="">
             <a:extLst xmlns:a="http://schemas.openxmlformats.org/drawingml/2006/main">
               <a:ext uri="{FF2B5EF4-FFF2-40B4-BE49-F238E27FC236}">
-                <a16:creationId xmlns:a16="http://schemas.microsoft.com/office/drawing/2014/main" id="{E45BFFBD-22C9-4524-AC32-00DBD48B434C}"/>
+                <a16:creationId xmlns:a16="http://schemas.microsoft.com/office/drawing/2014/main" id="{020DD32B-9955-49EF-8B3A-B5676D5F60EA}"/>
               </a:ext>
             </a:extLst>
           </p:cNvPr>
@@ -3662,7 +3662,7 @@
           <p:cNvPr id="15" name="">
             <a:extLst xmlns:a="http://schemas.openxmlformats.org/drawingml/2006/main">
               <a:ext uri="{FF2B5EF4-FFF2-40B4-BE49-F238E27FC236}">
-                <a16:creationId xmlns:a16="http://schemas.microsoft.com/office/drawing/2014/main" id="{513D936E-1832-438A-8EC0-21F344B2CD1C}"/>
+                <a16:creationId xmlns:a16="http://schemas.microsoft.com/office/drawing/2014/main" id="{7A283AE6-5444-4919-AC09-72EAD29D58CA}"/>
               </a:ext>
             </a:extLst>
           </p:cNvPr>
@@ -3712,7 +3712,7 @@
           <p:cNvPr id="16" name="">
             <a:extLst xmlns:a="http://schemas.openxmlformats.org/drawingml/2006/main">
               <a:ext uri="{FF2B5EF4-FFF2-40B4-BE49-F238E27FC236}">
-                <a16:creationId xmlns:a16="http://schemas.microsoft.com/office/drawing/2014/main" id="{2F16AB79-5BF4-4534-9482-48FE6343D845}"/>
+                <a16:creationId xmlns:a16="http://schemas.microsoft.com/office/drawing/2014/main" id="{F685C9FB-EA77-4707-B161-6C582EF1AE5D}"/>
               </a:ext>
             </a:extLst>
           </p:cNvPr>
@@ -3747,7 +3747,7 @@
           <p:cNvPr id="17" name="">
             <a:extLst xmlns:a="http://schemas.openxmlformats.org/drawingml/2006/main">
               <a:ext uri="{FF2B5EF4-FFF2-40B4-BE49-F238E27FC236}">
-                <a16:creationId xmlns:a16="http://schemas.microsoft.com/office/drawing/2014/main" id="{3AD44598-679A-450B-9D6C-CD0338B0DC59}"/>
+                <a16:creationId xmlns:a16="http://schemas.microsoft.com/office/drawing/2014/main" id="{4556B4E8-371C-43BA-8C33-206015433121}"/>
               </a:ext>
             </a:extLst>
           </p:cNvPr>
@@ -3797,7 +3797,7 @@
           <p:cNvPr id="18" name="">
             <a:extLst xmlns:a="http://schemas.openxmlformats.org/drawingml/2006/main">
               <a:ext uri="{FF2B5EF4-FFF2-40B4-BE49-F238E27FC236}">
-                <a16:creationId xmlns:a16="http://schemas.microsoft.com/office/drawing/2014/main" id="{24A07B65-7A6C-4A24-B258-C79A8677D34D}"/>
+                <a16:creationId xmlns:a16="http://schemas.microsoft.com/office/drawing/2014/main" id="{CD974939-7366-46F7-9B0C-AEAF6B49BE1C}"/>
               </a:ext>
             </a:extLst>
           </p:cNvPr>
@@ -3847,7 +3847,7 @@
           <p:cNvPr id="19" name="">
             <a:extLst xmlns:a="http://schemas.openxmlformats.org/drawingml/2006/main">
               <a:ext uri="{FF2B5EF4-FFF2-40B4-BE49-F238E27FC236}">
-                <a16:creationId xmlns:a16="http://schemas.microsoft.com/office/drawing/2014/main" id="{2B832555-B672-4BFC-9692-9B2AEA8D3A37}"/>
+                <a16:creationId xmlns:a16="http://schemas.microsoft.com/office/drawing/2014/main" id="{5BDBBB92-0048-4B5E-9C5C-FD38F219DCA5}"/>
               </a:ext>
             </a:extLst>
           </p:cNvPr>
@@ -3882,7 +3882,7 @@
           <p:cNvPr id="20" name="">
             <a:extLst xmlns:a="http://schemas.openxmlformats.org/drawingml/2006/main">
               <a:ext uri="{FF2B5EF4-FFF2-40B4-BE49-F238E27FC236}">
-                <a16:creationId xmlns:a16="http://schemas.microsoft.com/office/drawing/2014/main" id="{3CDEACB9-2E44-4915-94DD-4F75DBB66205}"/>
+                <a16:creationId xmlns:a16="http://schemas.microsoft.com/office/drawing/2014/main" id="{EEBA0CAC-E234-4A61-B8C6-B555A565ECAA}"/>
               </a:ext>
             </a:extLst>
           </p:cNvPr>
@@ -3932,7 +3932,7 @@
           <p:cNvPr id="21" name="">
             <a:extLst xmlns:a="http://schemas.openxmlformats.org/drawingml/2006/main">
               <a:ext uri="{FF2B5EF4-FFF2-40B4-BE49-F238E27FC236}">
-                <a16:creationId xmlns:a16="http://schemas.microsoft.com/office/drawing/2014/main" id="{8B8C5346-1E5E-4B41-8330-89E22DDE6B31}"/>
+                <a16:creationId xmlns:a16="http://schemas.microsoft.com/office/drawing/2014/main" id="{F3D4C6CC-F65E-4E70-A0AC-F170369DC212}"/>
               </a:ext>
             </a:extLst>
           </p:cNvPr>
@@ -3982,7 +3982,7 @@
           <p:cNvPr id="22" name="">
             <a:extLst xmlns:a="http://schemas.openxmlformats.org/drawingml/2006/main">
               <a:ext uri="{FF2B5EF4-FFF2-40B4-BE49-F238E27FC236}">
-                <a16:creationId xmlns:a16="http://schemas.microsoft.com/office/drawing/2014/main" id="{A0D065CD-0F62-4B48-971F-FF2C55F6267C}"/>
+                <a16:creationId xmlns:a16="http://schemas.microsoft.com/office/drawing/2014/main" id="{49C8ABCB-0732-4E38-95E1-E578555A6E79}"/>
               </a:ext>
             </a:extLst>
           </p:cNvPr>
@@ -4030,7 +4030,7 @@
     </p:spTree>
     <p:extLst>
       <p:ext uri="{BB962C8B-B14F-4D97-AF65-F5344CB8AC3E}">
-        <p14:creationId xmlns:p14="http://schemas.microsoft.com/office/powerpoint/2010/main" val="2004263710"/>
+        <p14:creationId xmlns:p14="http://schemas.microsoft.com/office/powerpoint/2010/main" val="1426493035"/>
       </p:ext>
     </p:extLst>
   </p:cSld>
@@ -4061,7 +4061,7 @@
           <p:cNvPr id="1" name="">
             <a:extLst xmlns:a="http://schemas.openxmlformats.org/drawingml/2006/main">
               <a:ext uri="{FF2B5EF4-FFF2-40B4-BE49-F238E27FC236}">
-                <a16:creationId xmlns:a16="http://schemas.microsoft.com/office/drawing/2014/main" id="{832ED005-CE8B-4E35-80EE-7F1E3325AFDC}"/>
+                <a16:creationId xmlns:a16="http://schemas.microsoft.com/office/drawing/2014/main" id="{385BDAA3-4EB1-4367-8700-C06FCFFF8EA0}"/>
               </a:ext>
             </a:extLst>
           </p:cNvPr>
@@ -4111,7 +4111,7 @@
           <p:cNvPr id="2" name="">
             <a:extLst xmlns:a="http://schemas.openxmlformats.org/drawingml/2006/main">
               <a:ext uri="{FF2B5EF4-FFF2-40B4-BE49-F238E27FC236}">
-                <a16:creationId xmlns:a16="http://schemas.microsoft.com/office/drawing/2014/main" id="{D51E8BA2-CC78-4A00-B0C1-BE75EAFD1160}"/>
+                <a16:creationId xmlns:a16="http://schemas.microsoft.com/office/drawing/2014/main" id="{8FB02A3A-3A92-49A6-B2FF-08B752CBF640}"/>
               </a:ext>
             </a:extLst>
           </p:cNvPr>
@@ -4151,7 +4151,7 @@
                   <a:srgbClr val="58706E"/>
                 </a:solidFill>
               </a:rPr>
-              <a:t>可配置销售 Agent 工作流：发现线索、识别画像、真实触达、持续跟进。</a:t>
+              <a:t>A configurable sales-agent workflow for discovery, qualification, real outreach, and follow-up.</a:t>
             </a:r>
           </a:p>
         </p:txBody>
@@ -4161,7 +4161,7 @@
           <p:cNvPr id="3" name="">
             <a:extLst xmlns:a="http://schemas.openxmlformats.org/drawingml/2006/main">
               <a:ext uri="{FF2B5EF4-FFF2-40B4-BE49-F238E27FC236}">
-                <a16:creationId xmlns:a16="http://schemas.microsoft.com/office/drawing/2014/main" id="{B60FF0A1-6083-403D-BF09-80FF2C4B9E04}"/>
+                <a16:creationId xmlns:a16="http://schemas.microsoft.com/office/drawing/2014/main" id="{3FFA14F6-5EE0-4196-A4C4-12E943571458}"/>
               </a:ext>
             </a:extLst>
           </p:cNvPr>
@@ -4240,7 +4240,7 @@
           <p:cNvPr id="4" name="">
             <a:extLst xmlns:a="http://schemas.openxmlformats.org/drawingml/2006/main">
               <a:ext uri="{FF2B5EF4-FFF2-40B4-BE49-F238E27FC236}">
-                <a16:creationId xmlns:a16="http://schemas.microsoft.com/office/drawing/2014/main" id="{89066E49-A23F-4B8A-89DE-D728A39286AE}"/>
+                <a16:creationId xmlns:a16="http://schemas.microsoft.com/office/drawing/2014/main" id="{C76A4314-AB5F-43CC-9D29-627A0BF4D5E8}"/>
               </a:ext>
             </a:extLst>
           </p:cNvPr>
@@ -4319,7 +4319,7 @@
           <p:cNvPr id="5" name="">
             <a:extLst xmlns:a="http://schemas.openxmlformats.org/drawingml/2006/main">
               <a:ext uri="{FF2B5EF4-FFF2-40B4-BE49-F238E27FC236}">
-                <a16:creationId xmlns:a16="http://schemas.microsoft.com/office/drawing/2014/main" id="{59B87B02-CFBE-434C-8A2C-6FFC10C9A9F9}"/>
+                <a16:creationId xmlns:a16="http://schemas.microsoft.com/office/drawing/2014/main" id="{D6EE4048-35A4-4FF3-B80B-1FB04BC8DC4A}"/>
               </a:ext>
             </a:extLst>
           </p:cNvPr>
@@ -4352,7 +4352,7 @@
           <p:cNvPr id="6" name="">
             <a:extLst xmlns:a="http://schemas.openxmlformats.org/drawingml/2006/main">
               <a:ext uri="{FF2B5EF4-FFF2-40B4-BE49-F238E27FC236}">
-                <a16:creationId xmlns:a16="http://schemas.microsoft.com/office/drawing/2014/main" id="{606B1BB6-585D-4D79-A002-0FCE09206656}"/>
+                <a16:creationId xmlns:a16="http://schemas.microsoft.com/office/drawing/2014/main" id="{CE8E80C3-10DD-427E-8254-B3F3C4469EB1}"/>
               </a:ext>
             </a:extLst>
           </p:cNvPr>
@@ -4431,7 +4431,7 @@
           <p:cNvPr id="7" name="">
             <a:extLst xmlns:a="http://schemas.openxmlformats.org/drawingml/2006/main">
               <a:ext uri="{FF2B5EF4-FFF2-40B4-BE49-F238E27FC236}">
-                <a16:creationId xmlns:a16="http://schemas.microsoft.com/office/drawing/2014/main" id="{7B5BE9F3-2074-4BDA-9754-88B142AFF51D}"/>
+                <a16:creationId xmlns:a16="http://schemas.microsoft.com/office/drawing/2014/main" id="{04AE8826-2A7E-414D-8BB4-3799FC4B23EE}"/>
               </a:ext>
             </a:extLst>
           </p:cNvPr>
@@ -4464,7 +4464,7 @@
           <p:cNvPr id="8" name="">
             <a:extLst xmlns:a="http://schemas.openxmlformats.org/drawingml/2006/main">
               <a:ext uri="{FF2B5EF4-FFF2-40B4-BE49-F238E27FC236}">
-                <a16:creationId xmlns:a16="http://schemas.microsoft.com/office/drawing/2014/main" id="{8836C4EB-CEC7-4CD8-9F8D-E7C05716C075}"/>
+                <a16:creationId xmlns:a16="http://schemas.microsoft.com/office/drawing/2014/main" id="{F7C223D8-A5D2-443A-A416-4B40210A1D64}"/>
               </a:ext>
             </a:extLst>
           </p:cNvPr>
@@ -4543,7 +4543,7 @@
           <p:cNvPr id="9" name="">
             <a:extLst xmlns:a="http://schemas.openxmlformats.org/drawingml/2006/main">
               <a:ext uri="{FF2B5EF4-FFF2-40B4-BE49-F238E27FC236}">
-                <a16:creationId xmlns:a16="http://schemas.microsoft.com/office/drawing/2014/main" id="{9F7DC228-ABD8-485C-8848-29BC27CADF2C}"/>
+                <a16:creationId xmlns:a16="http://schemas.microsoft.com/office/drawing/2014/main" id="{530EF90B-DF0A-4540-9840-019A4A5DE84B}"/>
               </a:ext>
             </a:extLst>
           </p:cNvPr>
@@ -4576,7 +4576,7 @@
           <p:cNvPr id="10" name="">
             <a:extLst xmlns:a="http://schemas.openxmlformats.org/drawingml/2006/main">
               <a:ext uri="{FF2B5EF4-FFF2-40B4-BE49-F238E27FC236}">
-                <a16:creationId xmlns:a16="http://schemas.microsoft.com/office/drawing/2014/main" id="{BB0A0076-1706-452C-AC60-32685BF011E7}"/>
+                <a16:creationId xmlns:a16="http://schemas.microsoft.com/office/drawing/2014/main" id="{9668A2BF-83EE-4C16-B038-223FE01959F3}"/>
               </a:ext>
             </a:extLst>
           </p:cNvPr>
@@ -4655,7 +4655,7 @@
           <p:cNvPr id="11" name="">
             <a:extLst xmlns:a="http://schemas.openxmlformats.org/drawingml/2006/main">
               <a:ext uri="{FF2B5EF4-FFF2-40B4-BE49-F238E27FC236}">
-                <a16:creationId xmlns:a16="http://schemas.microsoft.com/office/drawing/2014/main" id="{86132D75-B3B2-4340-99E6-11D7F1EA9E13}"/>
+                <a16:creationId xmlns:a16="http://schemas.microsoft.com/office/drawing/2014/main" id="{5BA8B849-5252-434E-AAB9-BA26CA30CFB4}"/>
               </a:ext>
             </a:extLst>
           </p:cNvPr>
@@ -4688,7 +4688,7 @@
           <p:cNvPr id="12" name="">
             <a:extLst xmlns:a="http://schemas.openxmlformats.org/drawingml/2006/main">
               <a:ext uri="{FF2B5EF4-FFF2-40B4-BE49-F238E27FC236}">
-                <a16:creationId xmlns:a16="http://schemas.microsoft.com/office/drawing/2014/main" id="{1897389A-38C3-4306-A32C-92CCB5380862}"/>
+                <a16:creationId xmlns:a16="http://schemas.microsoft.com/office/drawing/2014/main" id="{6D919FBC-95D9-4475-B70E-BD734D1441CA}"/>
               </a:ext>
             </a:extLst>
           </p:cNvPr>
@@ -4767,7 +4767,7 @@
           <p:cNvPr id="13" name="">
             <a:extLst xmlns:a="http://schemas.openxmlformats.org/drawingml/2006/main">
               <a:ext uri="{FF2B5EF4-FFF2-40B4-BE49-F238E27FC236}">
-                <a16:creationId xmlns:a16="http://schemas.microsoft.com/office/drawing/2014/main" id="{69300D5A-1C0A-4709-B718-8F696391A60C}"/>
+                <a16:creationId xmlns:a16="http://schemas.microsoft.com/office/drawing/2014/main" id="{93705B15-6238-42C5-BFB1-010129C1E061}"/>
               </a:ext>
             </a:extLst>
           </p:cNvPr>
@@ -4800,7 +4800,7 @@
           <p:cNvPr id="14" name="">
             <a:extLst xmlns:a="http://schemas.openxmlformats.org/drawingml/2006/main">
               <a:ext uri="{FF2B5EF4-FFF2-40B4-BE49-F238E27FC236}">
-                <a16:creationId xmlns:a16="http://schemas.microsoft.com/office/drawing/2014/main" id="{5550866D-E9D4-49E5-A45F-AF31A6A5B347}"/>
+                <a16:creationId xmlns:a16="http://schemas.microsoft.com/office/drawing/2014/main" id="{9A8511BF-A590-4C68-AA09-A621F0AE9A1E}"/>
               </a:ext>
             </a:extLst>
           </p:cNvPr>
@@ -4850,19 +4850,19 @@
           <p:cNvPr id="15" name="">
             <a:extLst xmlns:a="http://schemas.openxmlformats.org/drawingml/2006/main">
               <a:ext uri="{FF2B5EF4-FFF2-40B4-BE49-F238E27FC236}">
-                <a16:creationId xmlns:a16="http://schemas.microsoft.com/office/drawing/2014/main" id="{DF43C417-0F63-4642-91B0-FE4348C8DCD8}"/>
-              </a:ext>
-            </a:extLst>
-          </p:cNvPr>
-          <p:cNvSpPr>
-            <a:spLocks xmlns:a="http://schemas.openxmlformats.org/drawingml/2006/main" noGrp="1"/>
-          </p:cNvSpPr>
-          <p:nvPr/>
-        </p:nvSpPr>
-        <p:spPr>
-          <a:xfrm xmlns:a="http://schemas.openxmlformats.org/drawingml/2006/main">
-            <a:off x="2190750" y="5067300"/>
-            <a:ext cx="7810500" cy="285750"/>
+                <a16:creationId xmlns:a16="http://schemas.microsoft.com/office/drawing/2014/main" id="{A4388ADB-49D2-4E7B-BE0F-D552D7CA74A5}"/>
+              </a:ext>
+            </a:extLst>
+          </p:cNvPr>
+          <p:cNvSpPr>
+            <a:spLocks xmlns:a="http://schemas.openxmlformats.org/drawingml/2006/main" noGrp="1"/>
+          </p:cNvSpPr>
+          <p:nvPr/>
+        </p:nvSpPr>
+        <p:spPr>
+          <a:xfrm xmlns:a="http://schemas.openxmlformats.org/drawingml/2006/main">
+            <a:off x="1809750" y="5067300"/>
+            <a:ext cx="8572500" cy="323850"/>
           </a:xfrm>
           <a:prstGeom xmlns:a="http://schemas.openxmlformats.org/drawingml/2006/main" prst="rect">
             <a:avLst/>
@@ -4890,7 +4890,7 @@
                   <a:srgbClr val="58706E"/>
                 </a:solidFill>
               </a:rPr>
-              <a:t>Agent 角色、行业场景、沟通语气、线索字段和跟进策略都可以配置。</a:t>
+              <a:t>Playbooks make the same engine adaptable across real estate and other social lead-generation scenarios.</a:t>
             </a:r>
           </a:p>
         </p:txBody>
@@ -4900,7 +4900,7 @@
           <p:cNvPr id="16" name="">
             <a:extLst xmlns:a="http://schemas.openxmlformats.org/drawingml/2006/main">
               <a:ext uri="{FF2B5EF4-FFF2-40B4-BE49-F238E27FC236}">
-                <a16:creationId xmlns:a16="http://schemas.microsoft.com/office/drawing/2014/main" id="{5A234E62-2325-4823-BC55-4C3229A110F8}"/>
+                <a16:creationId xmlns:a16="http://schemas.microsoft.com/office/drawing/2014/main" id="{CA8827FB-9DBD-45CD-92B6-CA32C8694A03}"/>
               </a:ext>
             </a:extLst>
           </p:cNvPr>
@@ -4948,7 +4948,7 @@
     </p:spTree>
     <p:extLst>
       <p:ext uri="{BB962C8B-B14F-4D97-AF65-F5344CB8AC3E}">
-        <p14:creationId xmlns:p14="http://schemas.microsoft.com/office/powerpoint/2010/main" val="1310514988"/>
+        <p14:creationId xmlns:p14="http://schemas.microsoft.com/office/powerpoint/2010/main" val="1805271302"/>
       </p:ext>
     </p:extLst>
   </p:cSld>
@@ -4979,7 +4979,7 @@
           <p:cNvPr id="1" name="">
             <a:extLst xmlns:a="http://schemas.openxmlformats.org/drawingml/2006/main">
               <a:ext uri="{FF2B5EF4-FFF2-40B4-BE49-F238E27FC236}">
-                <a16:creationId xmlns:a16="http://schemas.microsoft.com/office/drawing/2014/main" id="{0DFC504E-F677-4238-AE40-0AB7961205F4}"/>
+                <a16:creationId xmlns:a16="http://schemas.microsoft.com/office/drawing/2014/main" id="{2B7D222D-C02B-41D2-942D-35AE34861271}"/>
               </a:ext>
             </a:extLst>
           </p:cNvPr>
@@ -5029,7 +5029,7 @@
           <p:cNvPr id="2" name="">
             <a:extLst xmlns:a="http://schemas.openxmlformats.org/drawingml/2006/main">
               <a:ext uri="{FF2B5EF4-FFF2-40B4-BE49-F238E27FC236}">
-                <a16:creationId xmlns:a16="http://schemas.microsoft.com/office/drawing/2014/main" id="{F76C003A-F8D3-4D48-BA39-0D3DA96B6A0F}"/>
+                <a16:creationId xmlns:a16="http://schemas.microsoft.com/office/drawing/2014/main" id="{02EEE98F-C99C-4712-BA35-3E22F8D570B4}"/>
               </a:ext>
             </a:extLst>
           </p:cNvPr>
@@ -5069,7 +5069,7 @@
                   <a:srgbClr val="58706E"/>
                 </a:solidFill>
               </a:rPr>
-              <a:t>演示会展示从社交意图到真实私信触达，再到持续跟进的完整闭环。</a:t>
+              <a:t>The demo shows the complete loop from social intent to real DM outreach and continued follow-up.</a:t>
             </a:r>
           </a:p>
         </p:txBody>
@@ -5079,7 +5079,7 @@
           <p:cNvPr id="3" name="">
             <a:extLst xmlns:a="http://schemas.openxmlformats.org/drawingml/2006/main">
               <a:ext uri="{FF2B5EF4-FFF2-40B4-BE49-F238E27FC236}">
-                <a16:creationId xmlns:a16="http://schemas.microsoft.com/office/drawing/2014/main" id="{83A7CD84-2AB7-45D5-B047-2CEAD25C1D6B}"/>
+                <a16:creationId xmlns:a16="http://schemas.microsoft.com/office/drawing/2014/main" id="{B3F48ACC-AB9F-402B-880B-47EF357A0B55}"/>
               </a:ext>
             </a:extLst>
           </p:cNvPr>
@@ -5131,7 +5131,7 @@
           <p:cNvPr id="4" name="">
             <a:extLst xmlns:a="http://schemas.openxmlformats.org/drawingml/2006/main">
               <a:ext uri="{FF2B5EF4-FFF2-40B4-BE49-F238E27FC236}">
-                <a16:creationId xmlns:a16="http://schemas.microsoft.com/office/drawing/2014/main" id="{68AF069F-51F5-46A6-9CEC-A8C2F4EBA97B}"/>
+                <a16:creationId xmlns:a16="http://schemas.microsoft.com/office/drawing/2014/main" id="{428E137E-2102-4C76-9353-098CFFED0A17}"/>
               </a:ext>
             </a:extLst>
           </p:cNvPr>
@@ -5181,7 +5181,7 @@
           <p:cNvPr id="5" name="">
             <a:extLst xmlns:a="http://schemas.openxmlformats.org/drawingml/2006/main">
               <a:ext uri="{FF2B5EF4-FFF2-40B4-BE49-F238E27FC236}">
-                <a16:creationId xmlns:a16="http://schemas.microsoft.com/office/drawing/2014/main" id="{35E73E9F-AF72-46C6-B86B-C27D73740968}"/>
+                <a16:creationId xmlns:a16="http://schemas.microsoft.com/office/drawing/2014/main" id="{EADF33E1-1709-472A-9DB8-B31F73EB9036}"/>
               </a:ext>
             </a:extLst>
           </p:cNvPr>
@@ -5231,7 +5231,7 @@
           <p:cNvPr id="6" name="">
             <a:extLst xmlns:a="http://schemas.openxmlformats.org/drawingml/2006/main">
               <a:ext uri="{FF2B5EF4-FFF2-40B4-BE49-F238E27FC236}">
-                <a16:creationId xmlns:a16="http://schemas.microsoft.com/office/drawing/2014/main" id="{569332FD-1C08-4CDD-BFAF-3A9314A4C080}"/>
+                <a16:creationId xmlns:a16="http://schemas.microsoft.com/office/drawing/2014/main" id="{1C9C527A-16B1-4E03-9293-47E292BD1865}"/>
               </a:ext>
             </a:extLst>
           </p:cNvPr>
@@ -5283,7 +5283,7 @@
           <p:cNvPr id="7" name="">
             <a:extLst xmlns:a="http://schemas.openxmlformats.org/drawingml/2006/main">
               <a:ext uri="{FF2B5EF4-FFF2-40B4-BE49-F238E27FC236}">
-                <a16:creationId xmlns:a16="http://schemas.microsoft.com/office/drawing/2014/main" id="{024BA4A9-4BEB-4B7F-B7AC-59804CF0061D}"/>
+                <a16:creationId xmlns:a16="http://schemas.microsoft.com/office/drawing/2014/main" id="{476CE0F0-6A34-41B0-9893-971F46A7FF3A}"/>
               </a:ext>
             </a:extLst>
           </p:cNvPr>
@@ -5333,7 +5333,7 @@
           <p:cNvPr id="8" name="">
             <a:extLst xmlns:a="http://schemas.openxmlformats.org/drawingml/2006/main">
               <a:ext uri="{FF2B5EF4-FFF2-40B4-BE49-F238E27FC236}">
-                <a16:creationId xmlns:a16="http://schemas.microsoft.com/office/drawing/2014/main" id="{6558133A-13FE-4682-9301-C1975DB902FF}"/>
+                <a16:creationId xmlns:a16="http://schemas.microsoft.com/office/drawing/2014/main" id="{320327D8-9F1F-4D4F-ABDD-A0DA60903D0D}"/>
               </a:ext>
             </a:extLst>
           </p:cNvPr>
@@ -5383,7 +5383,7 @@
           <p:cNvPr id="9" name="">
             <a:extLst xmlns:a="http://schemas.openxmlformats.org/drawingml/2006/main">
               <a:ext uri="{FF2B5EF4-FFF2-40B4-BE49-F238E27FC236}">
-                <a16:creationId xmlns:a16="http://schemas.microsoft.com/office/drawing/2014/main" id="{FF378EBE-BE8E-4B37-8D6D-645B245FC864}"/>
+                <a16:creationId xmlns:a16="http://schemas.microsoft.com/office/drawing/2014/main" id="{9131FCBF-747E-4AD1-B71B-A361E296B287}"/>
               </a:ext>
             </a:extLst>
           </p:cNvPr>
@@ -5416,7 +5416,7 @@
           <p:cNvPr id="10" name="">
             <a:extLst xmlns:a="http://schemas.openxmlformats.org/drawingml/2006/main">
               <a:ext uri="{FF2B5EF4-FFF2-40B4-BE49-F238E27FC236}">
-                <a16:creationId xmlns:a16="http://schemas.microsoft.com/office/drawing/2014/main" id="{65C03AAE-FF80-4904-A4F5-AF5340018E70}"/>
+                <a16:creationId xmlns:a16="http://schemas.microsoft.com/office/drawing/2014/main" id="{CB151551-507D-42FB-A0C6-5E617E73FDCC}"/>
               </a:ext>
             </a:extLst>
           </p:cNvPr>
@@ -5468,7 +5468,7 @@
           <p:cNvPr id="11" name="">
             <a:extLst xmlns:a="http://schemas.openxmlformats.org/drawingml/2006/main">
               <a:ext uri="{FF2B5EF4-FFF2-40B4-BE49-F238E27FC236}">
-                <a16:creationId xmlns:a16="http://schemas.microsoft.com/office/drawing/2014/main" id="{CDB6F9DA-D826-4A0B-8B48-9B8C4DAAFBD4}"/>
+                <a16:creationId xmlns:a16="http://schemas.microsoft.com/office/drawing/2014/main" id="{60ED911F-A645-431F-B3B6-F4F4601386D8}"/>
               </a:ext>
             </a:extLst>
           </p:cNvPr>
@@ -5518,7 +5518,7 @@
           <p:cNvPr id="12" name="">
             <a:extLst xmlns:a="http://schemas.openxmlformats.org/drawingml/2006/main">
               <a:ext uri="{FF2B5EF4-FFF2-40B4-BE49-F238E27FC236}">
-                <a16:creationId xmlns:a16="http://schemas.microsoft.com/office/drawing/2014/main" id="{16128985-D5AC-461A-98FA-6C27A9247E4A}"/>
+                <a16:creationId xmlns:a16="http://schemas.microsoft.com/office/drawing/2014/main" id="{5241E605-948E-44F7-9C80-A86014E4B057}"/>
               </a:ext>
             </a:extLst>
           </p:cNvPr>
@@ -5568,7 +5568,7 @@
           <p:cNvPr id="13" name="">
             <a:extLst xmlns:a="http://schemas.openxmlformats.org/drawingml/2006/main">
               <a:ext uri="{FF2B5EF4-FFF2-40B4-BE49-F238E27FC236}">
-                <a16:creationId xmlns:a16="http://schemas.microsoft.com/office/drawing/2014/main" id="{42ABA411-5B05-4D05-AE49-5B7EC4622843}"/>
+                <a16:creationId xmlns:a16="http://schemas.microsoft.com/office/drawing/2014/main" id="{EFD6DF13-6198-4605-B060-829C1C9F2F2B}"/>
               </a:ext>
             </a:extLst>
           </p:cNvPr>
@@ -5601,7 +5601,7 @@
           <p:cNvPr id="14" name="">
             <a:extLst xmlns:a="http://schemas.openxmlformats.org/drawingml/2006/main">
               <a:ext uri="{FF2B5EF4-FFF2-40B4-BE49-F238E27FC236}">
-                <a16:creationId xmlns:a16="http://schemas.microsoft.com/office/drawing/2014/main" id="{33FAB5FF-BB93-4A32-8034-369506C3D1DC}"/>
+                <a16:creationId xmlns:a16="http://schemas.microsoft.com/office/drawing/2014/main" id="{98FE0366-4C9A-426B-834A-13C5DD610D40}"/>
               </a:ext>
             </a:extLst>
           </p:cNvPr>
@@ -5653,7 +5653,7 @@
           <p:cNvPr id="15" name="">
             <a:extLst xmlns:a="http://schemas.openxmlformats.org/drawingml/2006/main">
               <a:ext uri="{FF2B5EF4-FFF2-40B4-BE49-F238E27FC236}">
-                <a16:creationId xmlns:a16="http://schemas.microsoft.com/office/drawing/2014/main" id="{B84C8425-134D-479A-9167-ABEBBECDEE94}"/>
+                <a16:creationId xmlns:a16="http://schemas.microsoft.com/office/drawing/2014/main" id="{476B5A35-94B5-4673-9480-EDC029B280DE}"/>
               </a:ext>
             </a:extLst>
           </p:cNvPr>
@@ -5703,7 +5703,7 @@
           <p:cNvPr id="16" name="">
             <a:extLst xmlns:a="http://schemas.openxmlformats.org/drawingml/2006/main">
               <a:ext uri="{FF2B5EF4-FFF2-40B4-BE49-F238E27FC236}">
-                <a16:creationId xmlns:a16="http://schemas.microsoft.com/office/drawing/2014/main" id="{336534F0-E82D-4F79-BA67-5A795C5D7B97}"/>
+                <a16:creationId xmlns:a16="http://schemas.microsoft.com/office/drawing/2014/main" id="{3DCD54F5-FE40-408E-B15F-B12AA5ADDBED}"/>
               </a:ext>
             </a:extLst>
           </p:cNvPr>
@@ -5753,7 +5753,7 @@
           <p:cNvPr id="17" name="">
             <a:extLst xmlns:a="http://schemas.openxmlformats.org/drawingml/2006/main">
               <a:ext uri="{FF2B5EF4-FFF2-40B4-BE49-F238E27FC236}">
-                <a16:creationId xmlns:a16="http://schemas.microsoft.com/office/drawing/2014/main" id="{E4C0FCE3-B5A7-47C5-B341-2B665A54AA27}"/>
+                <a16:creationId xmlns:a16="http://schemas.microsoft.com/office/drawing/2014/main" id="{743644F6-C7D5-4D98-89BB-6E808EA1151C}"/>
               </a:ext>
             </a:extLst>
           </p:cNvPr>
@@ -5786,7 +5786,7 @@
           <p:cNvPr id="18" name="">
             <a:extLst xmlns:a="http://schemas.openxmlformats.org/drawingml/2006/main">
               <a:ext uri="{FF2B5EF4-FFF2-40B4-BE49-F238E27FC236}">
-                <a16:creationId xmlns:a16="http://schemas.microsoft.com/office/drawing/2014/main" id="{219444F3-056C-46BB-A0A2-F93D260D4342}"/>
+                <a16:creationId xmlns:a16="http://schemas.microsoft.com/office/drawing/2014/main" id="{5F9EE7E8-D8CD-4684-B01F-02A9D7A9C830}"/>
               </a:ext>
             </a:extLst>
           </p:cNvPr>
@@ -5838,7 +5838,7 @@
           <p:cNvPr id="19" name="">
             <a:extLst xmlns:a="http://schemas.openxmlformats.org/drawingml/2006/main">
               <a:ext uri="{FF2B5EF4-FFF2-40B4-BE49-F238E27FC236}">
-                <a16:creationId xmlns:a16="http://schemas.microsoft.com/office/drawing/2014/main" id="{9D11E881-8D77-478A-8CF5-CE658062B603}"/>
+                <a16:creationId xmlns:a16="http://schemas.microsoft.com/office/drawing/2014/main" id="{1C8F41FA-570B-40FE-998D-6C8E1F6D0B40}"/>
               </a:ext>
             </a:extLst>
           </p:cNvPr>
@@ -5888,7 +5888,7 @@
           <p:cNvPr id="20" name="">
             <a:extLst xmlns:a="http://schemas.openxmlformats.org/drawingml/2006/main">
               <a:ext uri="{FF2B5EF4-FFF2-40B4-BE49-F238E27FC236}">
-                <a16:creationId xmlns:a16="http://schemas.microsoft.com/office/drawing/2014/main" id="{E03C45BF-D537-4BC1-9471-7F015892380E}"/>
+                <a16:creationId xmlns:a16="http://schemas.microsoft.com/office/drawing/2014/main" id="{ADBA1C22-101D-4647-B5C3-105E0C9E1384}"/>
               </a:ext>
             </a:extLst>
           </p:cNvPr>
@@ -5938,7 +5938,7 @@
           <p:cNvPr id="21" name="">
             <a:extLst xmlns:a="http://schemas.openxmlformats.org/drawingml/2006/main">
               <a:ext uri="{FF2B5EF4-FFF2-40B4-BE49-F238E27FC236}">
-                <a16:creationId xmlns:a16="http://schemas.microsoft.com/office/drawing/2014/main" id="{7B99BC65-98F9-4B91-A544-90E10DBA211A}"/>
+                <a16:creationId xmlns:a16="http://schemas.microsoft.com/office/drawing/2014/main" id="{F382B4D5-D22B-4800-B24A-F1B4C498C439}"/>
               </a:ext>
             </a:extLst>
           </p:cNvPr>
@@ -5971,7 +5971,7 @@
           <p:cNvPr id="22" name="">
             <a:extLst xmlns:a="http://schemas.openxmlformats.org/drawingml/2006/main">
               <a:ext uri="{FF2B5EF4-FFF2-40B4-BE49-F238E27FC236}">
-                <a16:creationId xmlns:a16="http://schemas.microsoft.com/office/drawing/2014/main" id="{DFEE9286-2DDA-44F3-A30C-53F1E02DD702}"/>
+                <a16:creationId xmlns:a16="http://schemas.microsoft.com/office/drawing/2014/main" id="{666C7671-0F03-4857-B0A7-D3160C2E4A1E}"/>
               </a:ext>
             </a:extLst>
           </p:cNvPr>
@@ -6023,7 +6023,7 @@
           <p:cNvPr id="23" name="">
             <a:extLst xmlns:a="http://schemas.openxmlformats.org/drawingml/2006/main">
               <a:ext uri="{FF2B5EF4-FFF2-40B4-BE49-F238E27FC236}">
-                <a16:creationId xmlns:a16="http://schemas.microsoft.com/office/drawing/2014/main" id="{C9F1BD84-CA3D-4816-963B-A6A24C848D55}"/>
+                <a16:creationId xmlns:a16="http://schemas.microsoft.com/office/drawing/2014/main" id="{F24339C3-2446-434E-BA4D-7E21A3FE29F9}"/>
               </a:ext>
             </a:extLst>
           </p:cNvPr>
@@ -6073,7 +6073,7 @@
           <p:cNvPr id="24" name="">
             <a:extLst xmlns:a="http://schemas.openxmlformats.org/drawingml/2006/main">
               <a:ext uri="{FF2B5EF4-FFF2-40B4-BE49-F238E27FC236}">
-                <a16:creationId xmlns:a16="http://schemas.microsoft.com/office/drawing/2014/main" id="{E4A7C34A-9903-4E72-BA29-1B8EFB98E010}"/>
+                <a16:creationId xmlns:a16="http://schemas.microsoft.com/office/drawing/2014/main" id="{CCB22131-7071-4C46-9D55-E283FA5BAFEB}"/>
               </a:ext>
             </a:extLst>
           </p:cNvPr>
@@ -6123,7 +6123,7 @@
           <p:cNvPr id="25" name="">
             <a:extLst xmlns:a="http://schemas.openxmlformats.org/drawingml/2006/main">
               <a:ext uri="{FF2B5EF4-FFF2-40B4-BE49-F238E27FC236}">
-                <a16:creationId xmlns:a16="http://schemas.microsoft.com/office/drawing/2014/main" id="{FEC6E13E-912D-40EB-84D3-0E13A6A2044C}"/>
+                <a16:creationId xmlns:a16="http://schemas.microsoft.com/office/drawing/2014/main" id="{3BFE5D60-0999-49E1-A336-64B66C995ED5}"/>
               </a:ext>
             </a:extLst>
           </p:cNvPr>
@@ -6156,7 +6156,7 @@
           <p:cNvPr id="26" name="">
             <a:extLst xmlns:a="http://schemas.openxmlformats.org/drawingml/2006/main">
               <a:ext uri="{FF2B5EF4-FFF2-40B4-BE49-F238E27FC236}">
-                <a16:creationId xmlns:a16="http://schemas.microsoft.com/office/drawing/2014/main" id="{19BECFC6-AE23-4467-AC38-A622D99393A8}"/>
+                <a16:creationId xmlns:a16="http://schemas.microsoft.com/office/drawing/2014/main" id="{D82A7F39-8CD1-4108-9933-0A0FCF15BD94}"/>
               </a:ext>
             </a:extLst>
           </p:cNvPr>
@@ -6206,7 +6206,7 @@
           <p:cNvPr id="27" name="">
             <a:extLst xmlns:a="http://schemas.openxmlformats.org/drawingml/2006/main">
               <a:ext uri="{FF2B5EF4-FFF2-40B4-BE49-F238E27FC236}">
-                <a16:creationId xmlns:a16="http://schemas.microsoft.com/office/drawing/2014/main" id="{765FBE2D-84D9-4B16-B75B-78D2B1102F4D}"/>
+                <a16:creationId xmlns:a16="http://schemas.microsoft.com/office/drawing/2014/main" id="{1F6A0C5F-824C-4913-822B-AFF9E67D6730}"/>
               </a:ext>
             </a:extLst>
           </p:cNvPr>
@@ -6254,7 +6254,7 @@
     </p:spTree>
     <p:extLst>
       <p:ext uri="{BB962C8B-B14F-4D97-AF65-F5344CB8AC3E}">
-        <p14:creationId xmlns:p14="http://schemas.microsoft.com/office/powerpoint/2010/main" val="693660192"/>
+        <p14:creationId xmlns:p14="http://schemas.microsoft.com/office/powerpoint/2010/main" val="136881005"/>
       </p:ext>
     </p:extLst>
   </p:cSld>
@@ -6285,7 +6285,7 @@
           <p:cNvPr id="1" name="">
             <a:extLst xmlns:a="http://schemas.openxmlformats.org/drawingml/2006/main">
               <a:ext uri="{FF2B5EF4-FFF2-40B4-BE49-F238E27FC236}">
-                <a16:creationId xmlns:a16="http://schemas.microsoft.com/office/drawing/2014/main" id="{59C1029F-17D5-422E-A742-4CF648D3E44D}"/>
+                <a16:creationId xmlns:a16="http://schemas.microsoft.com/office/drawing/2014/main" id="{175E8293-ABFE-43EC-ABC9-3341E9D29F95}"/>
               </a:ext>
             </a:extLst>
           </p:cNvPr>
@@ -6335,7 +6335,7 @@
           <p:cNvPr id="2" name="">
             <a:extLst xmlns:a="http://schemas.openxmlformats.org/drawingml/2006/main">
               <a:ext uri="{FF2B5EF4-FFF2-40B4-BE49-F238E27FC236}">
-                <a16:creationId xmlns:a16="http://schemas.microsoft.com/office/drawing/2014/main" id="{0C0B0CE7-7831-4A75-818E-2DCC684A3D08}"/>
+                <a16:creationId xmlns:a16="http://schemas.microsoft.com/office/drawing/2014/main" id="{81FD7AF2-6EEE-4CAB-BA66-C87ECEA81776}"/>
               </a:ext>
             </a:extLst>
           </p:cNvPr>
@@ -6375,7 +6375,7 @@
                   <a:srgbClr val="58706E"/>
                 </a:solidFill>
               </a:rPr>
-              <a:t>围绕社交获客真实工作流，而不是只做 CRM 页面。</a:t>
+              <a:t>Built around the real social acquisition workflow, not just a CRM screen.</a:t>
             </a:r>
           </a:p>
         </p:txBody>
@@ -6385,7 +6385,7 @@
           <p:cNvPr id="3" name="">
             <a:extLst xmlns:a="http://schemas.openxmlformats.org/drawingml/2006/main">
               <a:ext uri="{FF2B5EF4-FFF2-40B4-BE49-F238E27FC236}">
-                <a16:creationId xmlns:a16="http://schemas.microsoft.com/office/drawing/2014/main" id="{0E327D5F-AAA9-4D77-8601-DED4637D7117}"/>
+                <a16:creationId xmlns:a16="http://schemas.microsoft.com/office/drawing/2014/main" id="{1501F6CF-7161-4C8B-8A1B-4185596C7807}"/>
               </a:ext>
             </a:extLst>
           </p:cNvPr>
@@ -6426,7 +6426,7 @@
           <p:cNvPr id="4" name="">
             <a:extLst xmlns:a="http://schemas.openxmlformats.org/drawingml/2006/main">
               <a:ext uri="{FF2B5EF4-FFF2-40B4-BE49-F238E27FC236}">
-                <a16:creationId xmlns:a16="http://schemas.microsoft.com/office/drawing/2014/main" id="{5A09B570-9A14-4897-8527-D3B08C1AB02C}"/>
+                <a16:creationId xmlns:a16="http://schemas.microsoft.com/office/drawing/2014/main" id="{6842EA96-DCCC-4FB9-A1C1-A7BE09329B78}"/>
               </a:ext>
             </a:extLst>
           </p:cNvPr>
@@ -6459,7 +6459,7 @@
           <p:cNvPr id="5" name="">
             <a:extLst xmlns:a="http://schemas.openxmlformats.org/drawingml/2006/main">
               <a:ext uri="{FF2B5EF4-FFF2-40B4-BE49-F238E27FC236}">
-                <a16:creationId xmlns:a16="http://schemas.microsoft.com/office/drawing/2014/main" id="{0CF2B781-8416-43D8-9505-402FBBD1A353}"/>
+                <a16:creationId xmlns:a16="http://schemas.microsoft.com/office/drawing/2014/main" id="{E2198B37-C314-43EB-901A-77F8E58753FA}"/>
               </a:ext>
             </a:extLst>
           </p:cNvPr>
@@ -6509,7 +6509,7 @@
           <p:cNvPr id="6" name="">
             <a:extLst xmlns:a="http://schemas.openxmlformats.org/drawingml/2006/main">
               <a:ext uri="{FF2B5EF4-FFF2-40B4-BE49-F238E27FC236}">
-                <a16:creationId xmlns:a16="http://schemas.microsoft.com/office/drawing/2014/main" id="{0A38C2AF-4F5F-4F15-B126-C355C1472D97}"/>
+                <a16:creationId xmlns:a16="http://schemas.microsoft.com/office/drawing/2014/main" id="{D918E090-A093-4AD4-93B4-6E4E6F8EBB8D}"/>
               </a:ext>
             </a:extLst>
           </p:cNvPr>
@@ -6559,7 +6559,7 @@
           <p:cNvPr id="7" name="">
             <a:extLst xmlns:a="http://schemas.openxmlformats.org/drawingml/2006/main">
               <a:ext uri="{FF2B5EF4-FFF2-40B4-BE49-F238E27FC236}">
-                <a16:creationId xmlns:a16="http://schemas.microsoft.com/office/drawing/2014/main" id="{E5B35242-5337-4C16-AE53-1535036D2015}"/>
+                <a16:creationId xmlns:a16="http://schemas.microsoft.com/office/drawing/2014/main" id="{E50C8AE9-2F3E-416F-B494-5D412AFD93F2}"/>
               </a:ext>
             </a:extLst>
           </p:cNvPr>
@@ -6600,7 +6600,7 @@
           <p:cNvPr id="8" name="">
             <a:extLst xmlns:a="http://schemas.openxmlformats.org/drawingml/2006/main">
               <a:ext uri="{FF2B5EF4-FFF2-40B4-BE49-F238E27FC236}">
-                <a16:creationId xmlns:a16="http://schemas.microsoft.com/office/drawing/2014/main" id="{01E7C7C5-BA28-46B8-8DCC-B69085F646D0}"/>
+                <a16:creationId xmlns:a16="http://schemas.microsoft.com/office/drawing/2014/main" id="{305939DA-515D-4746-A5A5-196DC11A180E}"/>
               </a:ext>
             </a:extLst>
           </p:cNvPr>
@@ -6633,7 +6633,7 @@
           <p:cNvPr id="9" name="">
             <a:extLst xmlns:a="http://schemas.openxmlformats.org/drawingml/2006/main">
               <a:ext uri="{FF2B5EF4-FFF2-40B4-BE49-F238E27FC236}">
-                <a16:creationId xmlns:a16="http://schemas.microsoft.com/office/drawing/2014/main" id="{F5499B25-277E-4BF0-A59D-74A8C94C1E9A}"/>
+                <a16:creationId xmlns:a16="http://schemas.microsoft.com/office/drawing/2014/main" id="{7D081A45-8695-4E2E-98F7-09B9A4901FE5}"/>
               </a:ext>
             </a:extLst>
           </p:cNvPr>
@@ -6683,7 +6683,7 @@
           <p:cNvPr id="10" name="">
             <a:extLst xmlns:a="http://schemas.openxmlformats.org/drawingml/2006/main">
               <a:ext uri="{FF2B5EF4-FFF2-40B4-BE49-F238E27FC236}">
-                <a16:creationId xmlns:a16="http://schemas.microsoft.com/office/drawing/2014/main" id="{2CE28F8B-23CF-4FA9-B40F-23F8B71C6814}"/>
+                <a16:creationId xmlns:a16="http://schemas.microsoft.com/office/drawing/2014/main" id="{86335038-B354-4A60-A4E5-B41F13DC97EE}"/>
               </a:ext>
             </a:extLst>
           </p:cNvPr>
@@ -6733,7 +6733,7 @@
           <p:cNvPr id="11" name="">
             <a:extLst xmlns:a="http://schemas.openxmlformats.org/drawingml/2006/main">
               <a:ext uri="{FF2B5EF4-FFF2-40B4-BE49-F238E27FC236}">
-                <a16:creationId xmlns:a16="http://schemas.microsoft.com/office/drawing/2014/main" id="{8339E88D-AB9D-4D0E-A16A-09C395785813}"/>
+                <a16:creationId xmlns:a16="http://schemas.microsoft.com/office/drawing/2014/main" id="{CC4824AD-5BD6-4003-8809-43710BFAFADE}"/>
               </a:ext>
             </a:extLst>
           </p:cNvPr>
@@ -6774,7 +6774,7 @@
           <p:cNvPr id="12" name="">
             <a:extLst xmlns:a="http://schemas.openxmlformats.org/drawingml/2006/main">
               <a:ext uri="{FF2B5EF4-FFF2-40B4-BE49-F238E27FC236}">
-                <a16:creationId xmlns:a16="http://schemas.microsoft.com/office/drawing/2014/main" id="{D177A907-E029-465C-A650-F177B0BFF2EE}"/>
+                <a16:creationId xmlns:a16="http://schemas.microsoft.com/office/drawing/2014/main" id="{EA53DEED-23D9-4FB2-A6DF-75B3CBF1B51D}"/>
               </a:ext>
             </a:extLst>
           </p:cNvPr>
@@ -6807,7 +6807,7 @@
           <p:cNvPr id="13" name="">
             <a:extLst xmlns:a="http://schemas.openxmlformats.org/drawingml/2006/main">
               <a:ext uri="{FF2B5EF4-FFF2-40B4-BE49-F238E27FC236}">
-                <a16:creationId xmlns:a16="http://schemas.microsoft.com/office/drawing/2014/main" id="{5982B10A-0D78-4A83-BC9D-799E024ADAE3}"/>
+                <a16:creationId xmlns:a16="http://schemas.microsoft.com/office/drawing/2014/main" id="{EA4CD417-7E40-4DC3-82A9-594A955BF7D1}"/>
               </a:ext>
             </a:extLst>
           </p:cNvPr>
@@ -6857,7 +6857,7 @@
           <p:cNvPr id="14" name="">
             <a:extLst xmlns:a="http://schemas.openxmlformats.org/drawingml/2006/main">
               <a:ext uri="{FF2B5EF4-FFF2-40B4-BE49-F238E27FC236}">
-                <a16:creationId xmlns:a16="http://schemas.microsoft.com/office/drawing/2014/main" id="{FB425F7E-5AA8-442A-985B-8CFB9C94D198}"/>
+                <a16:creationId xmlns:a16="http://schemas.microsoft.com/office/drawing/2014/main" id="{66EFA511-C5B6-41E9-80C1-59886C3ADD60}"/>
               </a:ext>
             </a:extLst>
           </p:cNvPr>
@@ -6907,7 +6907,7 @@
           <p:cNvPr id="15" name="">
             <a:extLst xmlns:a="http://schemas.openxmlformats.org/drawingml/2006/main">
               <a:ext uri="{FF2B5EF4-FFF2-40B4-BE49-F238E27FC236}">
-                <a16:creationId xmlns:a16="http://schemas.microsoft.com/office/drawing/2014/main" id="{3B3BC340-4248-4DE8-8A3A-8B025E51D488}"/>
+                <a16:creationId xmlns:a16="http://schemas.microsoft.com/office/drawing/2014/main" id="{345631E2-C135-4E36-8CD9-7C182CB8C0D6}"/>
               </a:ext>
             </a:extLst>
           </p:cNvPr>
@@ -6948,7 +6948,7 @@
           <p:cNvPr id="16" name="">
             <a:extLst xmlns:a="http://schemas.openxmlformats.org/drawingml/2006/main">
               <a:ext uri="{FF2B5EF4-FFF2-40B4-BE49-F238E27FC236}">
-                <a16:creationId xmlns:a16="http://schemas.microsoft.com/office/drawing/2014/main" id="{A17DDACE-EAE0-4718-8D9B-836F1DAF72D4}"/>
+                <a16:creationId xmlns:a16="http://schemas.microsoft.com/office/drawing/2014/main" id="{D045C04A-6367-493F-9A6E-0B996F66048E}"/>
               </a:ext>
             </a:extLst>
           </p:cNvPr>
@@ -6981,7 +6981,7 @@
           <p:cNvPr id="17" name="">
             <a:extLst xmlns:a="http://schemas.openxmlformats.org/drawingml/2006/main">
               <a:ext uri="{FF2B5EF4-FFF2-40B4-BE49-F238E27FC236}">
-                <a16:creationId xmlns:a16="http://schemas.microsoft.com/office/drawing/2014/main" id="{BFA7A5A7-5A3D-4AF6-B7A9-8B96E66B7711}"/>
+                <a16:creationId xmlns:a16="http://schemas.microsoft.com/office/drawing/2014/main" id="{6509E5E9-950A-4774-8721-93729F9DC844}"/>
               </a:ext>
             </a:extLst>
           </p:cNvPr>
@@ -7031,7 +7031,7 @@
           <p:cNvPr id="18" name="">
             <a:extLst xmlns:a="http://schemas.openxmlformats.org/drawingml/2006/main">
               <a:ext uri="{FF2B5EF4-FFF2-40B4-BE49-F238E27FC236}">
-                <a16:creationId xmlns:a16="http://schemas.microsoft.com/office/drawing/2014/main" id="{D723DFF4-96AC-4EB3-B0CF-B92EF235561A}"/>
+                <a16:creationId xmlns:a16="http://schemas.microsoft.com/office/drawing/2014/main" id="{5E21BCAE-C513-4ECE-97F6-9E367AC81547}"/>
               </a:ext>
             </a:extLst>
           </p:cNvPr>
@@ -7081,7 +7081,7 @@
           <p:cNvPr id="19" name="">
             <a:extLst xmlns:a="http://schemas.openxmlformats.org/drawingml/2006/main">
               <a:ext uri="{FF2B5EF4-FFF2-40B4-BE49-F238E27FC236}">
-                <a16:creationId xmlns:a16="http://schemas.microsoft.com/office/drawing/2014/main" id="{9F11CB93-D450-4189-9ED0-690E3F442855}"/>
+                <a16:creationId xmlns:a16="http://schemas.microsoft.com/office/drawing/2014/main" id="{1B4D3169-F105-4B6E-B76A-58C8792BDD2F}"/>
               </a:ext>
             </a:extLst>
           </p:cNvPr>
@@ -7129,7 +7129,7 @@
     </p:spTree>
     <p:extLst>
       <p:ext uri="{BB962C8B-B14F-4D97-AF65-F5344CB8AC3E}">
-        <p14:creationId xmlns:p14="http://schemas.microsoft.com/office/powerpoint/2010/main" val="1280234069"/>
+        <p14:creationId xmlns:p14="http://schemas.microsoft.com/office/powerpoint/2010/main" val="1103996228"/>
       </p:ext>
     </p:extLst>
   </p:cSld>
@@ -7160,7 +7160,7 @@
           <p:cNvPr id="1" name="">
             <a:extLst xmlns:a="http://schemas.openxmlformats.org/drawingml/2006/main">
               <a:ext uri="{FF2B5EF4-FFF2-40B4-BE49-F238E27FC236}">
-                <a16:creationId xmlns:a16="http://schemas.microsoft.com/office/drawing/2014/main" id="{E9150064-6F64-451B-868F-1A3AD65995B4}"/>
+                <a16:creationId xmlns:a16="http://schemas.microsoft.com/office/drawing/2014/main" id="{6EB97324-3499-4487-A201-1C42DEEF11EC}"/>
               </a:ext>
             </a:extLst>
           </p:cNvPr>
@@ -7210,7 +7210,7 @@
           <p:cNvPr id="2" name="">
             <a:extLst xmlns:a="http://schemas.openxmlformats.org/drawingml/2006/main">
               <a:ext uri="{FF2B5EF4-FFF2-40B4-BE49-F238E27FC236}">
-                <a16:creationId xmlns:a16="http://schemas.microsoft.com/office/drawing/2014/main" id="{86A9AF57-53C9-4F45-ACD6-CB23ACADD4E8}"/>
+                <a16:creationId xmlns:a16="http://schemas.microsoft.com/office/drawing/2014/main" id="{41B85415-8915-4474-9A32-FA88150C1F7E}"/>
               </a:ext>
             </a:extLst>
           </p:cNvPr>
@@ -7250,7 +7250,7 @@
                   <a:srgbClr val="58706E"/>
                 </a:solidFill>
               </a:rPr>
-              <a:t>Agent 自动化不是黑箱，每一步业务动作都能留下可验证记录。</a:t>
+              <a:t>Agent automation should not be a black box; every business action can leave a verifiable record.</a:t>
             </a:r>
           </a:p>
         </p:txBody>
@@ -7260,7 +7260,7 @@
           <p:cNvPr id="3" name="">
             <a:extLst xmlns:a="http://schemas.openxmlformats.org/drawingml/2006/main">
               <a:ext uri="{FF2B5EF4-FFF2-40B4-BE49-F238E27FC236}">
-                <a16:creationId xmlns:a16="http://schemas.microsoft.com/office/drawing/2014/main" id="{7183234F-F707-4550-A2B6-31F741246E8A}"/>
+                <a16:creationId xmlns:a16="http://schemas.microsoft.com/office/drawing/2014/main" id="{C3909C4F-4D0A-45CD-A902-A1DE20AE1AE1}"/>
               </a:ext>
             </a:extLst>
           </p:cNvPr>
@@ -7331,7 +7331,7 @@
           <p:cNvPr id="4" name="">
             <a:extLst xmlns:a="http://schemas.openxmlformats.org/drawingml/2006/main">
               <a:ext uri="{FF2B5EF4-FFF2-40B4-BE49-F238E27FC236}">
-                <a16:creationId xmlns:a16="http://schemas.microsoft.com/office/drawing/2014/main" id="{85E0A911-3EF6-43BF-B5C2-DB0CB113F04D}"/>
+                <a16:creationId xmlns:a16="http://schemas.microsoft.com/office/drawing/2014/main" id="{EBCC6B0D-B5E5-4FD5-92C2-AB1EECFE8558}"/>
               </a:ext>
             </a:extLst>
           </p:cNvPr>
@@ -7410,7 +7410,7 @@
           <p:cNvPr id="5" name="">
             <a:extLst xmlns:a="http://schemas.openxmlformats.org/drawingml/2006/main">
               <a:ext uri="{FF2B5EF4-FFF2-40B4-BE49-F238E27FC236}">
-                <a16:creationId xmlns:a16="http://schemas.microsoft.com/office/drawing/2014/main" id="{C207767A-06AD-4257-BB9E-89AC5AFCED7F}"/>
+                <a16:creationId xmlns:a16="http://schemas.microsoft.com/office/drawing/2014/main" id="{E878B21C-F4A5-418E-BA50-F9561BE79AA4}"/>
               </a:ext>
             </a:extLst>
           </p:cNvPr>
@@ -7443,7 +7443,7 @@
           <p:cNvPr id="6" name="">
             <a:extLst xmlns:a="http://schemas.openxmlformats.org/drawingml/2006/main">
               <a:ext uri="{FF2B5EF4-FFF2-40B4-BE49-F238E27FC236}">
-                <a16:creationId xmlns:a16="http://schemas.microsoft.com/office/drawing/2014/main" id="{AD218436-FCC2-4466-BEAC-8F6042D9D442}"/>
+                <a16:creationId xmlns:a16="http://schemas.microsoft.com/office/drawing/2014/main" id="{5844DCA4-358C-40B8-952A-73E7902FE9D0}"/>
               </a:ext>
             </a:extLst>
           </p:cNvPr>
@@ -7499,7 +7499,7 @@
           <p:cNvPr id="7" name="">
             <a:extLst xmlns:a="http://schemas.openxmlformats.org/drawingml/2006/main">
               <a:ext uri="{FF2B5EF4-FFF2-40B4-BE49-F238E27FC236}">
-                <a16:creationId xmlns:a16="http://schemas.microsoft.com/office/drawing/2014/main" id="{113A7CFD-F060-4CB2-8556-613F781394EF}"/>
+                <a16:creationId xmlns:a16="http://schemas.microsoft.com/office/drawing/2014/main" id="{0C44B482-2803-49CD-B980-8C6AB0550DA0}"/>
               </a:ext>
             </a:extLst>
           </p:cNvPr>
@@ -7555,7 +7555,7 @@
           <p:cNvPr id="8" name="">
             <a:extLst xmlns:a="http://schemas.openxmlformats.org/drawingml/2006/main">
               <a:ext uri="{FF2B5EF4-FFF2-40B4-BE49-F238E27FC236}">
-                <a16:creationId xmlns:a16="http://schemas.microsoft.com/office/drawing/2014/main" id="{3384A363-0C1E-4E4D-80A7-233382414058}"/>
+                <a16:creationId xmlns:a16="http://schemas.microsoft.com/office/drawing/2014/main" id="{0B5CD6B0-A1F0-49D1-9A84-AA936C061219}"/>
               </a:ext>
             </a:extLst>
           </p:cNvPr>
@@ -7611,7 +7611,7 @@
           <p:cNvPr id="9" name="">
             <a:extLst xmlns:a="http://schemas.openxmlformats.org/drawingml/2006/main">
               <a:ext uri="{FF2B5EF4-FFF2-40B4-BE49-F238E27FC236}">
-                <a16:creationId xmlns:a16="http://schemas.microsoft.com/office/drawing/2014/main" id="{ECD2A6EA-83B8-4E9A-B738-7CCF23C741FC}"/>
+                <a16:creationId xmlns:a16="http://schemas.microsoft.com/office/drawing/2014/main" id="{6A02BD47-8FAF-48A9-B566-F89505787515}"/>
               </a:ext>
             </a:extLst>
           </p:cNvPr>
@@ -7667,7 +7667,7 @@
           <p:cNvPr id="10" name="">
             <a:extLst xmlns:a="http://schemas.openxmlformats.org/drawingml/2006/main">
               <a:ext uri="{FF2B5EF4-FFF2-40B4-BE49-F238E27FC236}">
-                <a16:creationId xmlns:a16="http://schemas.microsoft.com/office/drawing/2014/main" id="{23FC2001-7AA0-4147-8E11-017B207C3268}"/>
+                <a16:creationId xmlns:a16="http://schemas.microsoft.com/office/drawing/2014/main" id="{F89997CE-6836-4323-BE5A-5053FA6516F9}"/>
               </a:ext>
             </a:extLst>
           </p:cNvPr>
@@ -7717,7 +7717,7 @@
           <p:cNvPr id="11" name="">
             <a:extLst xmlns:a="http://schemas.openxmlformats.org/drawingml/2006/main">
               <a:ext uri="{FF2B5EF4-FFF2-40B4-BE49-F238E27FC236}">
-                <a16:creationId xmlns:a16="http://schemas.microsoft.com/office/drawing/2014/main" id="{5B4DC805-D8D2-4C1F-B4AE-607A80168279}"/>
+                <a16:creationId xmlns:a16="http://schemas.microsoft.com/office/drawing/2014/main" id="{D700779C-AA10-4F39-AA79-6785F7A3FDEF}"/>
               </a:ext>
             </a:extLst>
           </p:cNvPr>
@@ -7765,7 +7765,7 @@
     </p:spTree>
     <p:extLst>
       <p:ext uri="{BB962C8B-B14F-4D97-AF65-F5344CB8AC3E}">
-        <p14:creationId xmlns:p14="http://schemas.microsoft.com/office/powerpoint/2010/main" val="1347802473"/>
+        <p14:creationId xmlns:p14="http://schemas.microsoft.com/office/powerpoint/2010/main" val="1187954973"/>
       </p:ext>
     </p:extLst>
   </p:cSld>
@@ -7796,7 +7796,7 @@
           <p:cNvPr id="1" name="">
             <a:extLst xmlns:a="http://schemas.openxmlformats.org/drawingml/2006/main">
               <a:ext uri="{FF2B5EF4-FFF2-40B4-BE49-F238E27FC236}">
-                <a16:creationId xmlns:a16="http://schemas.microsoft.com/office/drawing/2014/main" id="{0726A73A-5992-4F1E-8781-9D7593DCF57F}"/>
+                <a16:creationId xmlns:a16="http://schemas.microsoft.com/office/drawing/2014/main" id="{DDF56859-E5EF-46E0-9FF2-D7B66B9E6594}"/>
               </a:ext>
             </a:extLst>
           </p:cNvPr>
@@ -7846,7 +7846,7 @@
           <p:cNvPr id="2" name="">
             <a:extLst xmlns:a="http://schemas.openxmlformats.org/drawingml/2006/main">
               <a:ext uri="{FF2B5EF4-FFF2-40B4-BE49-F238E27FC236}">
-                <a16:creationId xmlns:a16="http://schemas.microsoft.com/office/drawing/2014/main" id="{B96FF23B-2A6F-46F9-A10C-5E1597681323}"/>
+                <a16:creationId xmlns:a16="http://schemas.microsoft.com/office/drawing/2014/main" id="{E53BDDBC-6AE2-44ED-BB83-8B2BDC01E8BF}"/>
               </a:ext>
             </a:extLst>
           </p:cNvPr>
@@ -7886,7 +7886,7 @@
                   <a:srgbClr val="58706E"/>
                 </a:solidFill>
               </a:rPr>
-              <a:t>当前 demo 是小红书 + 房产销售，但系统边界是可配置行业获客 Agent。</a:t>
+              <a:t>The demo starts with Xiaohongshu and real-estate sales, but the system is a configurable industry lead agent.</a:t>
             </a:r>
           </a:p>
         </p:txBody>
@@ -7896,7 +7896,7 @@
           <p:cNvPr id="3" name="">
             <a:extLst xmlns:a="http://schemas.openxmlformats.org/drawingml/2006/main">
               <a:ext uri="{FF2B5EF4-FFF2-40B4-BE49-F238E27FC236}">
-                <a16:creationId xmlns:a16="http://schemas.microsoft.com/office/drawing/2014/main" id="{6177DA58-7347-4AC0-A413-BF7AC963E351}"/>
+                <a16:creationId xmlns:a16="http://schemas.microsoft.com/office/drawing/2014/main" id="{9E5EEC75-01C4-4426-8103-7B7D153EE99E}"/>
               </a:ext>
             </a:extLst>
           </p:cNvPr>
@@ -7973,7 +7973,7 @@
           <p:cNvPr id="4" name="">
             <a:extLst xmlns:a="http://schemas.openxmlformats.org/drawingml/2006/main">
               <a:ext uri="{FF2B5EF4-FFF2-40B4-BE49-F238E27FC236}">
-                <a16:creationId xmlns:a16="http://schemas.microsoft.com/office/drawing/2014/main" id="{3B8AE662-0E01-4F5E-9713-2D2BC4DFA038}"/>
+                <a16:creationId xmlns:a16="http://schemas.microsoft.com/office/drawing/2014/main" id="{98A64F6A-F66C-42B3-9088-0D04E609234F}"/>
               </a:ext>
             </a:extLst>
           </p:cNvPr>
@@ -8029,7 +8029,7 @@
           <p:cNvPr id="5" name="">
             <a:extLst xmlns:a="http://schemas.openxmlformats.org/drawingml/2006/main">
               <a:ext uri="{FF2B5EF4-FFF2-40B4-BE49-F238E27FC236}">
-                <a16:creationId xmlns:a16="http://schemas.microsoft.com/office/drawing/2014/main" id="{0C6BBF2C-7E50-4C89-BAA5-2F36D0BF51DF}"/>
+                <a16:creationId xmlns:a16="http://schemas.microsoft.com/office/drawing/2014/main" id="{52709CC5-38DB-46EF-9FB5-978AE8F57BB5}"/>
               </a:ext>
             </a:extLst>
           </p:cNvPr>
@@ -8085,7 +8085,7 @@
           <p:cNvPr id="6" name="">
             <a:extLst xmlns:a="http://schemas.openxmlformats.org/drawingml/2006/main">
               <a:ext uri="{FF2B5EF4-FFF2-40B4-BE49-F238E27FC236}">
-                <a16:creationId xmlns:a16="http://schemas.microsoft.com/office/drawing/2014/main" id="{0EB23D83-603D-4FD4-92C5-AEDE0EB90A1D}"/>
+                <a16:creationId xmlns:a16="http://schemas.microsoft.com/office/drawing/2014/main" id="{0A875BF1-E953-4C13-9CBD-1B1321F2563D}"/>
               </a:ext>
             </a:extLst>
           </p:cNvPr>
@@ -8141,7 +8141,7 @@
           <p:cNvPr id="7" name="">
             <a:extLst xmlns:a="http://schemas.openxmlformats.org/drawingml/2006/main">
               <a:ext uri="{FF2B5EF4-FFF2-40B4-BE49-F238E27FC236}">
-                <a16:creationId xmlns:a16="http://schemas.microsoft.com/office/drawing/2014/main" id="{C4FE88C3-28DD-41C1-A626-B8CA157E6852}"/>
+                <a16:creationId xmlns:a16="http://schemas.microsoft.com/office/drawing/2014/main" id="{7DE3B758-BA2A-4125-81AD-2AB9C76DD6EA}"/>
               </a:ext>
             </a:extLst>
           </p:cNvPr>
@@ -8197,7 +8197,7 @@
           <p:cNvPr id="8" name="">
             <a:extLst xmlns:a="http://schemas.openxmlformats.org/drawingml/2006/main">
               <a:ext uri="{FF2B5EF4-FFF2-40B4-BE49-F238E27FC236}">
-                <a16:creationId xmlns:a16="http://schemas.microsoft.com/office/drawing/2014/main" id="{00E65A4D-91C9-4E12-9D1E-FD40CC24C744}"/>
+                <a16:creationId xmlns:a16="http://schemas.microsoft.com/office/drawing/2014/main" id="{19191B09-60F6-4922-9635-6454A4926B79}"/>
               </a:ext>
             </a:extLst>
           </p:cNvPr>
@@ -8253,7 +8253,7 @@
           <p:cNvPr id="9" name="">
             <a:extLst xmlns:a="http://schemas.openxmlformats.org/drawingml/2006/main">
               <a:ext uri="{FF2B5EF4-FFF2-40B4-BE49-F238E27FC236}">
-                <a16:creationId xmlns:a16="http://schemas.microsoft.com/office/drawing/2014/main" id="{048012BE-CD85-44B7-9141-040829EDF27A}"/>
+                <a16:creationId xmlns:a16="http://schemas.microsoft.com/office/drawing/2014/main" id="{3823D1D5-EEAD-4775-A9A8-0456E8E4037D}"/>
               </a:ext>
             </a:extLst>
           </p:cNvPr>
@@ -8309,7 +8309,7 @@
           <p:cNvPr id="10" name="">
             <a:extLst xmlns:a="http://schemas.openxmlformats.org/drawingml/2006/main">
               <a:ext uri="{FF2B5EF4-FFF2-40B4-BE49-F238E27FC236}">
-                <a16:creationId xmlns:a16="http://schemas.microsoft.com/office/drawing/2014/main" id="{D05FEB2D-690C-4845-A550-A6137ACE1A5D}"/>
+                <a16:creationId xmlns:a16="http://schemas.microsoft.com/office/drawing/2014/main" id="{DBFC6B7D-E5E3-4E7A-BCCE-8A15356EB6C7}"/>
               </a:ext>
             </a:extLst>
           </p:cNvPr>
@@ -8359,7 +8359,7 @@
           <p:cNvPr id="11" name="">
             <a:extLst xmlns:a="http://schemas.openxmlformats.org/drawingml/2006/main">
               <a:ext uri="{FF2B5EF4-FFF2-40B4-BE49-F238E27FC236}">
-                <a16:creationId xmlns:a16="http://schemas.microsoft.com/office/drawing/2014/main" id="{9C7D1CC2-44D3-4702-8B2E-C843F1D65588}"/>
+                <a16:creationId xmlns:a16="http://schemas.microsoft.com/office/drawing/2014/main" id="{89A82137-67B5-4013-B2EA-D81666A98662}"/>
               </a:ext>
             </a:extLst>
           </p:cNvPr>
@@ -8409,7 +8409,7 @@
           <p:cNvPr id="12" name="">
             <a:extLst xmlns:a="http://schemas.openxmlformats.org/drawingml/2006/main">
               <a:ext uri="{FF2B5EF4-FFF2-40B4-BE49-F238E27FC236}">
-                <a16:creationId xmlns:a16="http://schemas.microsoft.com/office/drawing/2014/main" id="{5DD510BD-B85A-44E2-BFC5-FA15DB32B949}"/>
+                <a16:creationId xmlns:a16="http://schemas.microsoft.com/office/drawing/2014/main" id="{23E24441-6C7E-4ADF-A0B8-033516672BFA}"/>
               </a:ext>
             </a:extLst>
           </p:cNvPr>
@@ -8457,7 +8457,7 @@
     </p:spTree>
     <p:extLst>
       <p:ext uri="{BB962C8B-B14F-4D97-AF65-F5344CB8AC3E}">
-        <p14:creationId xmlns:p14="http://schemas.microsoft.com/office/powerpoint/2010/main" val="1133752766"/>
+        <p14:creationId xmlns:p14="http://schemas.microsoft.com/office/powerpoint/2010/main" val="906279009"/>
       </p:ext>
     </p:extLst>
   </p:cSld>
@@ -8492,7 +8492,7 @@
           <p:nvPr/>
         </p:nvPicPr>
         <p:blipFill>
-          <a:blip xmlns:r="http://schemas.openxmlformats.org/officeDocument/2006/relationships" xmlns:a="http://schemas.openxmlformats.org/drawingml/2006/main" r:embed="R2dcf973d518545f1"/>
+          <a:blip xmlns:r="http://schemas.openxmlformats.org/officeDocument/2006/relationships" xmlns:a="http://schemas.openxmlformats.org/drawingml/2006/main" r:embed="R171223c9d346441c"/>
           <a:stretch xmlns:a="http://schemas.openxmlformats.org/drawingml/2006/main"/>
         </p:blipFill>
         <p:spPr>
@@ -8510,7 +8510,7 @@
           <p:cNvPr id="2" name="">
             <a:extLst xmlns:a="http://schemas.openxmlformats.org/drawingml/2006/main">
               <a:ext uri="{FF2B5EF4-FFF2-40B4-BE49-F238E27FC236}">
-                <a16:creationId xmlns:a16="http://schemas.microsoft.com/office/drawing/2014/main" id="{38C7685C-3D8E-4C21-8687-1A688E9D2817}"/>
+                <a16:creationId xmlns:a16="http://schemas.microsoft.com/office/drawing/2014/main" id="{52DCD5EB-F310-46AE-B150-1DE8977F1F0A}"/>
               </a:ext>
             </a:extLst>
           </p:cNvPr>
@@ -8577,7 +8577,7 @@
           <p:cNvPr id="3" name="">
             <a:extLst xmlns:a="http://schemas.openxmlformats.org/drawingml/2006/main">
               <a:ext uri="{FF2B5EF4-FFF2-40B4-BE49-F238E27FC236}">
-                <a16:creationId xmlns:a16="http://schemas.microsoft.com/office/drawing/2014/main" id="{FCF7431F-F34A-4FD0-BD61-F1BC110695E5}"/>
+                <a16:creationId xmlns:a16="http://schemas.microsoft.com/office/drawing/2014/main" id="{53EF5B9A-973D-4A88-8BF8-44B0664097E4}"/>
               </a:ext>
             </a:extLst>
           </p:cNvPr>
@@ -8627,7 +8627,7 @@
           <p:cNvPr id="4" name="">
             <a:extLst xmlns:a="http://schemas.openxmlformats.org/drawingml/2006/main">
               <a:ext uri="{FF2B5EF4-FFF2-40B4-BE49-F238E27FC236}">
-                <a16:creationId xmlns:a16="http://schemas.microsoft.com/office/drawing/2014/main" id="{B7EE4C5C-42B2-4DA6-B249-6C01FB3DE6E0}"/>
+                <a16:creationId xmlns:a16="http://schemas.microsoft.com/office/drawing/2014/main" id="{E43CC882-1F09-45F6-86B2-9079DB9E09A1}"/>
               </a:ext>
             </a:extLst>
           </p:cNvPr>
@@ -8667,7 +8667,7 @@
                   <a:srgbClr val="FFFFFF"/>
                 </a:solidFill>
               </a:rPr>
-              <a:t>把社交平台上的购买意向，自动转化为可验证、可持续跟进的客户触达</a:t>
+              <a:t>Social buying intent becomes verifiable, persistent customer outreach.</a:t>
             </a:r>
           </a:p>
         </p:txBody>
@@ -8677,7 +8677,7 @@
           <p:cNvPr id="5" name="">
             <a:extLst xmlns:a="http://schemas.openxmlformats.org/drawingml/2006/main">
               <a:ext uri="{FF2B5EF4-FFF2-40B4-BE49-F238E27FC236}">
-                <a16:creationId xmlns:a16="http://schemas.microsoft.com/office/drawing/2014/main" id="{C793A6E2-6A05-42E2-A93F-C2560688885B}"/>
+                <a16:creationId xmlns:a16="http://schemas.microsoft.com/office/drawing/2014/main" id="{B1023389-C155-426A-8CF7-FBE16726EE11}"/>
               </a:ext>
             </a:extLst>
           </p:cNvPr>
@@ -8733,7 +8733,7 @@
           <p:cNvPr id="6" name="">
             <a:extLst xmlns:a="http://schemas.openxmlformats.org/drawingml/2006/main">
               <a:ext uri="{FF2B5EF4-FFF2-40B4-BE49-F238E27FC236}">
-                <a16:creationId xmlns:a16="http://schemas.microsoft.com/office/drawing/2014/main" id="{21B8C70B-E62F-46BD-92D4-81A752846B2B}"/>
+                <a16:creationId xmlns:a16="http://schemas.microsoft.com/office/drawing/2014/main" id="{BDBA8AD2-DB4B-464A-96A4-45B988FF0072}"/>
               </a:ext>
             </a:extLst>
           </p:cNvPr>
@@ -8789,7 +8789,7 @@
           <p:cNvPr id="7" name="">
             <a:extLst xmlns:a="http://schemas.openxmlformats.org/drawingml/2006/main">
               <a:ext uri="{FF2B5EF4-FFF2-40B4-BE49-F238E27FC236}">
-                <a16:creationId xmlns:a16="http://schemas.microsoft.com/office/drawing/2014/main" id="{8DEDD7C8-456C-480B-8CEA-CF76F2AFCFA3}"/>
+                <a16:creationId xmlns:a16="http://schemas.microsoft.com/office/drawing/2014/main" id="{9AFBE420-9958-466B-AEE7-B507C5285841}"/>
               </a:ext>
             </a:extLst>
           </p:cNvPr>
@@ -8822,7 +8822,7 @@
           <p:cNvPr id="8" name="">
             <a:extLst xmlns:a="http://schemas.openxmlformats.org/drawingml/2006/main">
               <a:ext uri="{FF2B5EF4-FFF2-40B4-BE49-F238E27FC236}">
-                <a16:creationId xmlns:a16="http://schemas.microsoft.com/office/drawing/2014/main" id="{85EE255A-8857-461D-B713-3988ED994D90}"/>
+                <a16:creationId xmlns:a16="http://schemas.microsoft.com/office/drawing/2014/main" id="{6027E22E-151B-437C-9CB7-41F14AC3A230}"/>
               </a:ext>
             </a:extLst>
           </p:cNvPr>
@@ -8878,7 +8878,7 @@
           <p:cNvPr id="9" name="">
             <a:extLst xmlns:a="http://schemas.openxmlformats.org/drawingml/2006/main">
               <a:ext uri="{FF2B5EF4-FFF2-40B4-BE49-F238E27FC236}">
-                <a16:creationId xmlns:a16="http://schemas.microsoft.com/office/drawing/2014/main" id="{BA3DB260-C05E-475E-9344-6A9675822EAA}"/>
+                <a16:creationId xmlns:a16="http://schemas.microsoft.com/office/drawing/2014/main" id="{8F4DCC3F-B8A1-45A3-99AA-02DC1CB362A6}"/>
               </a:ext>
             </a:extLst>
           </p:cNvPr>
@@ -8911,7 +8911,7 @@
           <p:cNvPr id="10" name="">
             <a:extLst xmlns:a="http://schemas.openxmlformats.org/drawingml/2006/main">
               <a:ext uri="{FF2B5EF4-FFF2-40B4-BE49-F238E27FC236}">
-                <a16:creationId xmlns:a16="http://schemas.microsoft.com/office/drawing/2014/main" id="{264B5C1E-640B-49E6-ADDD-86A0A1B1F36B}"/>
+                <a16:creationId xmlns:a16="http://schemas.microsoft.com/office/drawing/2014/main" id="{7F404F6D-08CB-4730-B59B-CE0D339494B3}"/>
               </a:ext>
             </a:extLst>
           </p:cNvPr>
@@ -8967,7 +8967,7 @@
           <p:cNvPr id="11" name="">
             <a:extLst xmlns:a="http://schemas.openxmlformats.org/drawingml/2006/main">
               <a:ext uri="{FF2B5EF4-FFF2-40B4-BE49-F238E27FC236}">
-                <a16:creationId xmlns:a16="http://schemas.microsoft.com/office/drawing/2014/main" id="{D34487F5-7FC8-475D-A83F-6092BA2BC3D7}"/>
+                <a16:creationId xmlns:a16="http://schemas.microsoft.com/office/drawing/2014/main" id="{92D6EE4B-065B-4503-92AC-5390FA0145BF}"/>
               </a:ext>
             </a:extLst>
           </p:cNvPr>
@@ -8998,7 +8998,7 @@
     </p:spTree>
     <p:extLst>
       <p:ext uri="{BB962C8B-B14F-4D97-AF65-F5344CB8AC3E}">
-        <p14:creationId xmlns:p14="http://schemas.microsoft.com/office/powerpoint/2010/main" val="1559934365"/>
+        <p14:creationId xmlns:p14="http://schemas.microsoft.com/office/powerpoint/2010/main" val="1567575898"/>
       </p:ext>
     </p:extLst>
   </p:cSld>
